--- a/docs/Prezentacja_confrisk.pptx
+++ b/docs/Prezentacja_confrisk.pptx
@@ -20,9 +20,10 @@
     <p:sldId id="268" r:id="rId14"/>
     <p:sldId id="269" r:id="rId15"/>
     <p:sldId id="270" r:id="rId16"/>
+    <p:sldId id="271" r:id="rId17"/>
   </p:sldIdLst>
   <p:notesMasterIdLst>
-    <p:notesMasterId r:id="rId17"/>
+    <p:notesMasterId r:id="rId18"/>
   </p:notesMasterIdLst>
   <p:sldSz cx="12192000" cy="6858000"/>
   <p:notesSz cx="6858000" cy="12192000"/>
@@ -1347,6 +1348,94 @@
             <a:fld id="{F7021451-1387-4CA6-816F-3879F97B5CBC}" type="slidenum">
               <a:rPr lang="en-US"/>
               <a:t>15</a:t>
+            </a:fld>
+            <a:endParaRPr lang="en-US"/>
+          </a:p>
+        </p:txBody>
+      </p:sp>
+    </p:spTree>
+    <p:extLst>
+      <p:ext uri="{BB962C8B-B14F-4D97-AF65-F5344CB8AC3E}">
+        <p14:creationId xmlns:p14="http://schemas.microsoft.com/office/powerpoint/2010/main" val="1024086991"/>
+      </p:ext>
+    </p:extLst>
+  </p:cSld>
+  <p:clrMapOvr>
+    <a:masterClrMapping/>
+  </p:clrMapOvr>
+</p:notes>
+</file>
+
+<file path=ppt/notesSlides/notesSlide16.xml><?xml version="1.0" encoding="utf-8"?>
+<p:notes xmlns:a="http://schemas.openxmlformats.org/drawingml/2006/main" xmlns:r="http://schemas.openxmlformats.org/officeDocument/2006/relationships" xmlns:p="http://schemas.openxmlformats.org/presentationml/2006/main">
+  <p:cSld>
+    <p:spTree>
+      <p:nvGrpSpPr>
+        <p:cNvPr id="1" name=""/>
+        <p:cNvGrpSpPr/>
+        <p:nvPr/>
+      </p:nvGrpSpPr>
+      <p:grpSpPr>
+        <a:xfrm>
+          <a:off x="0" y="0"/>
+          <a:ext cx="0" cy="0"/>
+          <a:chOff x="0" y="0"/>
+          <a:chExt cx="0" cy="0"/>
+        </a:xfrm>
+      </p:grpSpPr>
+      <p:sp>
+        <p:nvSpPr>
+          <p:cNvPr id="2" name="Slide Image Placeholder 1"/>
+          <p:cNvSpPr>
+            <a:spLocks noGrp="1" noRot="1" noChangeAspect="1"/>
+          </p:cNvSpPr>
+          <p:nvPr>
+            <p:ph type="sldImg"/>
+          </p:nvPr>
+        </p:nvSpPr>
+        <p:spPr/>
+      </p:sp>
+      <p:sp>
+        <p:nvSpPr>
+          <p:cNvPr id="3" name="Notes Placeholder 2"/>
+          <p:cNvSpPr>
+            <a:spLocks noGrp="1"/>
+          </p:cNvSpPr>
+          <p:nvPr>
+            <p:ph type="body" idx="1"/>
+          </p:nvPr>
+        </p:nvSpPr>
+        <p:spPr/>
+        <p:txBody>
+          <a:bodyPr/>
+          <a:lstStyle/>
+          <a:p>
+            <a:r>
+              <a:rPr lang="en-US" dirty="0"/>
+              <a:t/>
+            </a:r>
+            <a:endParaRPr lang="en-US" dirty="0"/>
+          </a:p>
+        </p:txBody>
+      </p:sp>
+      <p:sp>
+        <p:nvSpPr>
+          <p:cNvPr id="4" name="Slide Number Placeholder 3"/>
+          <p:cNvSpPr>
+            <a:spLocks noGrp="1"/>
+          </p:cNvSpPr>
+          <p:nvPr>
+            <p:ph type="sldNum" sz="quarter" idx="10"/>
+          </p:nvPr>
+        </p:nvSpPr>
+        <p:spPr/>
+        <p:txBody>
+          <a:bodyPr/>
+          <a:lstStyle/>
+          <a:p>
+            <a:fld id="{F7021451-1387-4CA6-816F-3879F97B5CBC}" type="slidenum">
+              <a:rPr lang="en-US"/>
+              <a:t>16</a:t>
             </a:fld>
             <a:endParaRPr lang="en-US"/>
           </a:p>
@@ -4522,7 +4611,7 @@
                 <a:ea typeface="Calibri" pitchFamily="34" charset="-122"/>
                 <a:cs typeface="Calibri" pitchFamily="34" charset="-120"/>
               </a:rPr>
-              <a:t>DEMO</a:t>
+              <a:t>RAPORT</a:t>
             </a:r>
             <a:endParaRPr lang="en-US" sz="1200" dirty="0"/>
           </a:p>
@@ -4561,7 +4650,7 @@
                 <a:ea typeface="Georgia" pitchFamily="34" charset="-122"/>
                 <a:cs typeface="Georgia" pitchFamily="34" charset="-120"/>
               </a:rPr>
-              <a:t>Demo — zobacz, jak to działa</a:t>
+              <a:t>Raport HTML — jak powstaje</a:t>
             </a:r>
             <a:endParaRPr lang="en-US" sz="3000" dirty="0"/>
           </a:p>
@@ -4575,18 +4664,793 @@
         </p:nvSpPr>
         <p:spPr>
           <a:xfrm>
-            <a:off x="548640" y="1828800"/>
-            <a:ext cx="7040880" cy="3959352"/>
+            <a:off x="548640" y="1874520"/>
+            <a:ext cx="5349240" cy="713232"/>
           </a:xfrm>
           <a:prstGeom prst="rect">
             <a:avLst/>
           </a:prstGeom>
           <a:solidFill>
-            <a:srgbClr val="10243A"/>
+            <a:srgbClr val="FFFFFF"/>
           </a:solidFill>
-          <a:ln w="19050">
+          <a:ln/>
+          <a:effectLst>
+            <a:outerShdw sx="100000" sy="100000" kx="0" ky="0" algn="bl" rotWithShape="0" blurRad="114300" dist="38100" dir="8100000">
+              <a:srgbClr val="0F2A43">
+                <a:alpha val="14000"/>
+              </a:srgbClr>
+            </a:outerShdw>
+          </a:effectLst>
+        </p:spPr>
+      </p:sp>
+      <p:sp>
+        <p:nvSpPr>
+          <p:cNvPr id="6" name="Shape 4"/>
+          <p:cNvSpPr/>
+          <p:nvPr/>
+        </p:nvSpPr>
+        <p:spPr>
+          <a:xfrm>
+            <a:off x="548640" y="1874520"/>
+            <a:ext cx="82296" cy="713232"/>
+          </a:xfrm>
+          <a:prstGeom prst="rect">
+            <a:avLst/>
+          </a:prstGeom>
+          <a:solidFill>
+            <a:srgbClr val="00A896"/>
+          </a:solidFill>
+          <a:ln/>
+        </p:spPr>
+      </p:sp>
+      <p:sp>
+        <p:nvSpPr>
+          <p:cNvPr id="7" name="Shape 5"/>
+          <p:cNvSpPr/>
+          <p:nvPr/>
+        </p:nvSpPr>
+        <p:spPr>
+          <a:xfrm>
+            <a:off x="768096" y="2002536"/>
+            <a:ext cx="457200" cy="457200"/>
+          </a:xfrm>
+          <a:prstGeom prst="ellipse">
+            <a:avLst/>
+          </a:prstGeom>
+          <a:solidFill>
+            <a:srgbClr val="00A896"/>
+          </a:solidFill>
+          <a:ln/>
+        </p:spPr>
+      </p:sp>
+      <p:sp>
+        <p:nvSpPr>
+          <p:cNvPr id="8" name="Text 6"/>
+          <p:cNvSpPr/>
+          <p:nvPr/>
+        </p:nvSpPr>
+        <p:spPr>
+          <a:xfrm>
+            <a:off x="768096" y="2002536"/>
+            <a:ext cx="457200" cy="457200"/>
+          </a:xfrm>
+          <a:prstGeom prst="rect">
+            <a:avLst/>
+          </a:prstGeom>
+          <a:noFill/>
+          <a:ln/>
+        </p:spPr>
+        <p:txBody>
+          <a:bodyPr wrap="square" lIns="0" tIns="0" rIns="0" bIns="0" rtlCol="0" anchor="ctr"/>
+          <a:lstStyle/>
+          <a:p>
+            <a:pPr algn="ctr" indent="0" marL="0">
+              <a:buNone/>
+            </a:pPr>
+            <a:r>
+              <a:rPr lang="en-US" sz="1600" b="1" dirty="0">
+                <a:solidFill>
+                  <a:srgbClr val="FFFFFF"/>
+                </a:solidFill>
+                <a:latin typeface="Calibri" pitchFamily="34" charset="0"/>
+                <a:ea typeface="Calibri" pitchFamily="34" charset="-122"/>
+                <a:cs typeface="Calibri" pitchFamily="34" charset="-120"/>
+              </a:rPr>
+              <a:t>1</a:t>
+            </a:r>
+            <a:endParaRPr lang="en-US" sz="1600" dirty="0"/>
+          </a:p>
+        </p:txBody>
+      </p:sp>
+      <p:sp>
+        <p:nvSpPr>
+          <p:cNvPr id="9" name="Text 7"/>
+          <p:cNvSpPr/>
+          <p:nvPr/>
+        </p:nvSpPr>
+        <p:spPr>
+          <a:xfrm>
+            <a:off x="1389888" y="1929384"/>
+            <a:ext cx="4389120" cy="365760"/>
+          </a:xfrm>
+          <a:prstGeom prst="rect">
+            <a:avLst/>
+          </a:prstGeom>
+          <a:noFill/>
+          <a:ln/>
+        </p:spPr>
+        <p:txBody>
+          <a:bodyPr wrap="square" lIns="0" tIns="0" rIns="0" bIns="0" rtlCol="0" anchor="ctr"/>
+          <a:lstStyle/>
+          <a:p>
+            <a:pPr indent="0" marL="0">
+              <a:buNone/>
+            </a:pPr>
+            <a:r>
+              <a:rPr lang="en-US" sz="1450" b="1" dirty="0">
+                <a:solidFill>
+                  <a:srgbClr val="0F2A43"/>
+                </a:solidFill>
+                <a:latin typeface="Georgia" pitchFamily="34" charset="0"/>
+                <a:ea typeface="Georgia" pitchFamily="34" charset="-122"/>
+                <a:cs typeface="Georgia" pitchFamily="34" charset="-120"/>
+              </a:rPr>
+              <a:t>render() w report.rs</a:t>
+            </a:r>
+            <a:endParaRPr lang="en-US" sz="1450" dirty="0"/>
+          </a:p>
+        </p:txBody>
+      </p:sp>
+      <p:sp>
+        <p:nvSpPr>
+          <p:cNvPr id="10" name="Text 8"/>
+          <p:cNvSpPr/>
+          <p:nvPr/>
+        </p:nvSpPr>
+        <p:spPr>
+          <a:xfrm>
+            <a:off x="1389888" y="2258568"/>
+            <a:ext cx="4389120" cy="292608"/>
+          </a:xfrm>
+          <a:prstGeom prst="rect">
+            <a:avLst/>
+          </a:prstGeom>
+          <a:noFill/>
+          <a:ln/>
+        </p:spPr>
+        <p:txBody>
+          <a:bodyPr wrap="square" lIns="0" tIns="0" rIns="0" bIns="0" rtlCol="0" anchor="ctr"/>
+          <a:lstStyle/>
+          <a:p>
+            <a:pPr indent="0" marL="0">
+              <a:buNone/>
+            </a:pPr>
+            <a:r>
+              <a:rPr lang="en-US" sz="1200" dirty="0">
+                <a:solidFill>
+                  <a:srgbClr val="64748B"/>
+                </a:solidFill>
+                <a:latin typeface="Calibri" pitchFamily="34" charset="0"/>
+                <a:ea typeface="Calibri" pitchFamily="34" charset="-122"/>
+                <a:cs typeface="Calibri" pitchFamily="34" charset="-120"/>
+              </a:rPr>
+              <a:t>zbiera wyniki (ScoredFinding) i liczy podsumowanie</a:t>
+            </a:r>
+            <a:endParaRPr lang="en-US" sz="1200" dirty="0"/>
+          </a:p>
+        </p:txBody>
+      </p:sp>
+      <p:sp>
+        <p:nvSpPr>
+          <p:cNvPr id="11" name="Shape 9"/>
+          <p:cNvSpPr/>
+          <p:nvPr/>
+        </p:nvSpPr>
+        <p:spPr>
+          <a:xfrm>
+            <a:off x="548640" y="2715768"/>
+            <a:ext cx="5349240" cy="713232"/>
+          </a:xfrm>
+          <a:prstGeom prst="rect">
+            <a:avLst/>
+          </a:prstGeom>
+          <a:solidFill>
+            <a:srgbClr val="FFFFFF"/>
+          </a:solidFill>
+          <a:ln/>
+          <a:effectLst>
+            <a:outerShdw sx="100000" sy="100000" kx="0" ky="0" algn="bl" rotWithShape="0" blurRad="114300" dist="38100" dir="8100000">
+              <a:srgbClr val="0F2A43">
+                <a:alpha val="14000"/>
+              </a:srgbClr>
+            </a:outerShdw>
+          </a:effectLst>
+        </p:spPr>
+      </p:sp>
+      <p:sp>
+        <p:nvSpPr>
+          <p:cNvPr id="12" name="Shape 10"/>
+          <p:cNvSpPr/>
+          <p:nvPr/>
+        </p:nvSpPr>
+        <p:spPr>
+          <a:xfrm>
+            <a:off x="548640" y="2715768"/>
+            <a:ext cx="82296" cy="713232"/>
+          </a:xfrm>
+          <a:prstGeom prst="rect">
+            <a:avLst/>
+          </a:prstGeom>
+          <a:solidFill>
+            <a:srgbClr val="1D4E89"/>
+          </a:solidFill>
+          <a:ln/>
+        </p:spPr>
+      </p:sp>
+      <p:sp>
+        <p:nvSpPr>
+          <p:cNvPr id="13" name="Shape 11"/>
+          <p:cNvSpPr/>
+          <p:nvPr/>
+        </p:nvSpPr>
+        <p:spPr>
+          <a:xfrm>
+            <a:off x="768096" y="2843784"/>
+            <a:ext cx="457200" cy="457200"/>
+          </a:xfrm>
+          <a:prstGeom prst="ellipse">
+            <a:avLst/>
+          </a:prstGeom>
+          <a:solidFill>
+            <a:srgbClr val="1D4E89"/>
+          </a:solidFill>
+          <a:ln/>
+        </p:spPr>
+      </p:sp>
+      <p:sp>
+        <p:nvSpPr>
+          <p:cNvPr id="14" name="Text 12"/>
+          <p:cNvSpPr/>
+          <p:nvPr/>
+        </p:nvSpPr>
+        <p:spPr>
+          <a:xfrm>
+            <a:off x="768096" y="2843784"/>
+            <a:ext cx="457200" cy="457200"/>
+          </a:xfrm>
+          <a:prstGeom prst="rect">
+            <a:avLst/>
+          </a:prstGeom>
+          <a:noFill/>
+          <a:ln/>
+        </p:spPr>
+        <p:txBody>
+          <a:bodyPr wrap="square" lIns="0" tIns="0" rIns="0" bIns="0" rtlCol="0" anchor="ctr"/>
+          <a:lstStyle/>
+          <a:p>
+            <a:pPr algn="ctr" indent="0" marL="0">
+              <a:buNone/>
+            </a:pPr>
+            <a:r>
+              <a:rPr lang="en-US" sz="1600" b="1" dirty="0">
+                <a:solidFill>
+                  <a:srgbClr val="FFFFFF"/>
+                </a:solidFill>
+                <a:latin typeface="Calibri" pitchFamily="34" charset="0"/>
+                <a:ea typeface="Calibri" pitchFamily="34" charset="-122"/>
+                <a:cs typeface="Calibri" pitchFamily="34" charset="-120"/>
+              </a:rPr>
+              <a:t>2</a:t>
+            </a:r>
+            <a:endParaRPr lang="en-US" sz="1600" dirty="0"/>
+          </a:p>
+        </p:txBody>
+      </p:sp>
+      <p:sp>
+        <p:nvSpPr>
+          <p:cNvPr id="15" name="Text 13"/>
+          <p:cNvSpPr/>
+          <p:nvPr/>
+        </p:nvSpPr>
+        <p:spPr>
+          <a:xfrm>
+            <a:off x="1389888" y="2770632"/>
+            <a:ext cx="4389120" cy="365760"/>
+          </a:xfrm>
+          <a:prstGeom prst="rect">
+            <a:avLst/>
+          </a:prstGeom>
+          <a:noFill/>
+          <a:ln/>
+        </p:spPr>
+        <p:txBody>
+          <a:bodyPr wrap="square" lIns="0" tIns="0" rIns="0" bIns="0" rtlCol="0" anchor="ctr"/>
+          <a:lstStyle/>
+          <a:p>
+            <a:pPr indent="0" marL="0">
+              <a:buNone/>
+            </a:pPr>
+            <a:r>
+              <a:rPr lang="en-US" sz="1450" b="1" dirty="0">
+                <a:solidFill>
+                  <a:srgbClr val="0F2A43"/>
+                </a:solidFill>
+                <a:latin typeface="Georgia" pitchFamily="34" charset="0"/>
+                <a:ea typeface="Georgia" pitchFamily="34" charset="-122"/>
+                <a:cs typeface="Georgia" pitchFamily="34" charset="-120"/>
+              </a:rPr>
+              <a:t>Szablon HTML</a:t>
+            </a:r>
+            <a:endParaRPr lang="en-US" sz="1450" dirty="0"/>
+          </a:p>
+        </p:txBody>
+      </p:sp>
+      <p:sp>
+        <p:nvSpPr>
+          <p:cNvPr id="16" name="Text 14"/>
+          <p:cNvSpPr/>
+          <p:nvPr/>
+        </p:nvSpPr>
+        <p:spPr>
+          <a:xfrm>
+            <a:off x="1389888" y="3099816"/>
+            <a:ext cx="4389120" cy="292608"/>
+          </a:xfrm>
+          <a:prstGeom prst="rect">
+            <a:avLst/>
+          </a:prstGeom>
+          <a:noFill/>
+          <a:ln/>
+        </p:spPr>
+        <p:txBody>
+          <a:bodyPr wrap="square" lIns="0" tIns="0" rIns="0" bIns="0" rtlCol="0" anchor="ctr"/>
+          <a:lstStyle/>
+          <a:p>
+            <a:pPr indent="0" marL="0">
+              <a:buNone/>
+            </a:pPr>
+            <a:r>
+              <a:rPr lang="en-US" sz="1200" dirty="0">
+                <a:solidFill>
+                  <a:srgbClr val="64748B"/>
+                </a:solidFill>
+                <a:latin typeface="Calibri" pitchFamily="34" charset="0"/>
+                <a:ea typeface="Calibri" pitchFamily="34" charset="-122"/>
+                <a:cs typeface="Calibri" pitchFamily="34" charset="-120"/>
+              </a:rPr>
+              <a:t>dane wstrzyknięte do jednego pliku z wbudowanym CSS</a:t>
+            </a:r>
+            <a:endParaRPr lang="en-US" sz="1200" dirty="0"/>
+          </a:p>
+        </p:txBody>
+      </p:sp>
+      <p:sp>
+        <p:nvSpPr>
+          <p:cNvPr id="17" name="Shape 15"/>
+          <p:cNvSpPr/>
+          <p:nvPr/>
+        </p:nvSpPr>
+        <p:spPr>
+          <a:xfrm>
+            <a:off x="548640" y="3557016"/>
+            <a:ext cx="5349240" cy="713232"/>
+          </a:xfrm>
+          <a:prstGeom prst="rect">
+            <a:avLst/>
+          </a:prstGeom>
+          <a:solidFill>
+            <a:srgbClr val="FFFFFF"/>
+          </a:solidFill>
+          <a:ln/>
+          <a:effectLst>
+            <a:outerShdw sx="100000" sy="100000" kx="0" ky="0" algn="bl" rotWithShape="0" blurRad="114300" dist="38100" dir="8100000">
+              <a:srgbClr val="0F2A43">
+                <a:alpha val="14000"/>
+              </a:srgbClr>
+            </a:outerShdw>
+          </a:effectLst>
+        </p:spPr>
+      </p:sp>
+      <p:sp>
+        <p:nvSpPr>
+          <p:cNvPr id="18" name="Shape 16"/>
+          <p:cNvSpPr/>
+          <p:nvPr/>
+        </p:nvSpPr>
+        <p:spPr>
+          <a:xfrm>
+            <a:off x="548640" y="3557016"/>
+            <a:ext cx="82296" cy="713232"/>
+          </a:xfrm>
+          <a:prstGeom prst="rect">
+            <a:avLst/>
+          </a:prstGeom>
+          <a:solidFill>
+            <a:srgbClr val="00A896"/>
+          </a:solidFill>
+          <a:ln/>
+        </p:spPr>
+      </p:sp>
+      <p:sp>
+        <p:nvSpPr>
+          <p:cNvPr id="19" name="Shape 17"/>
+          <p:cNvSpPr/>
+          <p:nvPr/>
+        </p:nvSpPr>
+        <p:spPr>
+          <a:xfrm>
+            <a:off x="768096" y="3685032"/>
+            <a:ext cx="457200" cy="457200"/>
+          </a:xfrm>
+          <a:prstGeom prst="ellipse">
+            <a:avLst/>
+          </a:prstGeom>
+          <a:solidFill>
+            <a:srgbClr val="00A896"/>
+          </a:solidFill>
+          <a:ln/>
+        </p:spPr>
+      </p:sp>
+      <p:sp>
+        <p:nvSpPr>
+          <p:cNvPr id="20" name="Text 18"/>
+          <p:cNvSpPr/>
+          <p:nvPr/>
+        </p:nvSpPr>
+        <p:spPr>
+          <a:xfrm>
+            <a:off x="768096" y="3685032"/>
+            <a:ext cx="457200" cy="457200"/>
+          </a:xfrm>
+          <a:prstGeom prst="rect">
+            <a:avLst/>
+          </a:prstGeom>
+          <a:noFill/>
+          <a:ln/>
+        </p:spPr>
+        <p:txBody>
+          <a:bodyPr wrap="square" lIns="0" tIns="0" rIns="0" bIns="0" rtlCol="0" anchor="ctr"/>
+          <a:lstStyle/>
+          <a:p>
+            <a:pPr algn="ctr" indent="0" marL="0">
+              <a:buNone/>
+            </a:pPr>
+            <a:r>
+              <a:rPr lang="en-US" sz="1600" b="1" dirty="0">
+                <a:solidFill>
+                  <a:srgbClr val="FFFFFF"/>
+                </a:solidFill>
+                <a:latin typeface="Calibri" pitchFamily="34" charset="0"/>
+                <a:ea typeface="Calibri" pitchFamily="34" charset="-122"/>
+                <a:cs typeface="Calibri" pitchFamily="34" charset="-120"/>
+              </a:rPr>
+              <a:t>3</a:t>
+            </a:r>
+            <a:endParaRPr lang="en-US" sz="1600" dirty="0"/>
+          </a:p>
+        </p:txBody>
+      </p:sp>
+      <p:sp>
+        <p:nvSpPr>
+          <p:cNvPr id="21" name="Text 19"/>
+          <p:cNvSpPr/>
+          <p:nvPr/>
+        </p:nvSpPr>
+        <p:spPr>
+          <a:xfrm>
+            <a:off x="1389888" y="3611880"/>
+            <a:ext cx="4389120" cy="365760"/>
+          </a:xfrm>
+          <a:prstGeom prst="rect">
+            <a:avLst/>
+          </a:prstGeom>
+          <a:noFill/>
+          <a:ln/>
+        </p:spPr>
+        <p:txBody>
+          <a:bodyPr wrap="square" lIns="0" tIns="0" rIns="0" bIns="0" rtlCol="0" anchor="ctr"/>
+          <a:lstStyle/>
+          <a:p>
+            <a:pPr indent="0" marL="0">
+              <a:buNone/>
+            </a:pPr>
+            <a:r>
+              <a:rPr lang="en-US" sz="1450" b="1" dirty="0">
+                <a:solidFill>
+                  <a:srgbClr val="0F2A43"/>
+                </a:solidFill>
+                <a:latin typeface="Georgia" pitchFamily="34" charset="0"/>
+                <a:ea typeface="Georgia" pitchFamily="34" charset="-122"/>
+                <a:cs typeface="Georgia" pitchFamily="34" charset="-120"/>
+              </a:rPr>
+              <a:t>Rozwijane sekcje</a:t>
+            </a:r>
+            <a:endParaRPr lang="en-US" sz="1450" dirty="0"/>
+          </a:p>
+        </p:txBody>
+      </p:sp>
+      <p:sp>
+        <p:nvSpPr>
+          <p:cNvPr id="22" name="Text 20"/>
+          <p:cNvSpPr/>
+          <p:nvPr/>
+        </p:nvSpPr>
+        <p:spPr>
+          <a:xfrm>
+            <a:off x="1389888" y="3941064"/>
+            <a:ext cx="4389120" cy="292608"/>
+          </a:xfrm>
+          <a:prstGeom prst="rect">
+            <a:avLst/>
+          </a:prstGeom>
+          <a:noFill/>
+          <a:ln/>
+        </p:spPr>
+        <p:txBody>
+          <a:bodyPr wrap="square" lIns="0" tIns="0" rIns="0" bIns="0" rtlCol="0" anchor="ctr"/>
+          <a:lstStyle/>
+          <a:p>
+            <a:pPr indent="0" marL="0">
+              <a:buNone/>
+            </a:pPr>
+            <a:r>
+              <a:rPr lang="en-US" sz="1200" dirty="0">
+                <a:solidFill>
+                  <a:srgbClr val="64748B"/>
+                </a:solidFill>
+                <a:latin typeface="Calibri" pitchFamily="34" charset="0"/>
+                <a:ea typeface="Calibri" pitchFamily="34" charset="-122"/>
+                <a:cs typeface="Calibri" pitchFamily="34" charset="-120"/>
+              </a:rPr>
+              <a:t>każdy finding to &lt;details&gt;, sortowane po priorytecie</a:t>
+            </a:r>
+            <a:endParaRPr lang="en-US" sz="1200" dirty="0"/>
+          </a:p>
+        </p:txBody>
+      </p:sp>
+      <p:sp>
+        <p:nvSpPr>
+          <p:cNvPr id="23" name="Shape 21"/>
+          <p:cNvSpPr/>
+          <p:nvPr/>
+        </p:nvSpPr>
+        <p:spPr>
+          <a:xfrm>
+            <a:off x="548640" y="4398264"/>
+            <a:ext cx="5349240" cy="713232"/>
+          </a:xfrm>
+          <a:prstGeom prst="rect">
+            <a:avLst/>
+          </a:prstGeom>
+          <a:solidFill>
+            <a:srgbClr val="FFFFFF"/>
+          </a:solidFill>
+          <a:ln/>
+          <a:effectLst>
+            <a:outerShdw sx="100000" sy="100000" kx="0" ky="0" algn="bl" rotWithShape="0" blurRad="114300" dist="38100" dir="8100000">
+              <a:srgbClr val="0F2A43">
+                <a:alpha val="14000"/>
+              </a:srgbClr>
+            </a:outerShdw>
+          </a:effectLst>
+        </p:spPr>
+      </p:sp>
+      <p:sp>
+        <p:nvSpPr>
+          <p:cNvPr id="24" name="Shape 22"/>
+          <p:cNvSpPr/>
+          <p:nvPr/>
+        </p:nvSpPr>
+        <p:spPr>
+          <a:xfrm>
+            <a:off x="548640" y="4398264"/>
+            <a:ext cx="82296" cy="713232"/>
+          </a:xfrm>
+          <a:prstGeom prst="rect">
+            <a:avLst/>
+          </a:prstGeom>
+          <a:solidFill>
+            <a:srgbClr val="1D4E89"/>
+          </a:solidFill>
+          <a:ln/>
+        </p:spPr>
+      </p:sp>
+      <p:sp>
+        <p:nvSpPr>
+          <p:cNvPr id="25" name="Shape 23"/>
+          <p:cNvSpPr/>
+          <p:nvPr/>
+        </p:nvSpPr>
+        <p:spPr>
+          <a:xfrm>
+            <a:off x="768096" y="4526280"/>
+            <a:ext cx="457200" cy="457200"/>
+          </a:xfrm>
+          <a:prstGeom prst="ellipse">
+            <a:avLst/>
+          </a:prstGeom>
+          <a:solidFill>
+            <a:srgbClr val="1D4E89"/>
+          </a:solidFill>
+          <a:ln/>
+        </p:spPr>
+      </p:sp>
+      <p:sp>
+        <p:nvSpPr>
+          <p:cNvPr id="26" name="Text 24"/>
+          <p:cNvSpPr/>
+          <p:nvPr/>
+        </p:nvSpPr>
+        <p:spPr>
+          <a:xfrm>
+            <a:off x="768096" y="4526280"/>
+            <a:ext cx="457200" cy="457200"/>
+          </a:xfrm>
+          <a:prstGeom prst="rect">
+            <a:avLst/>
+          </a:prstGeom>
+          <a:noFill/>
+          <a:ln/>
+        </p:spPr>
+        <p:txBody>
+          <a:bodyPr wrap="square" lIns="0" tIns="0" rIns="0" bIns="0" rtlCol="0" anchor="ctr"/>
+          <a:lstStyle/>
+          <a:p>
+            <a:pPr algn="ctr" indent="0" marL="0">
+              <a:buNone/>
+            </a:pPr>
+            <a:r>
+              <a:rPr lang="en-US" sz="1600" b="1" dirty="0">
+                <a:solidFill>
+                  <a:srgbClr val="FFFFFF"/>
+                </a:solidFill>
+                <a:latin typeface="Calibri" pitchFamily="34" charset="0"/>
+                <a:ea typeface="Calibri" pitchFamily="34" charset="-122"/>
+                <a:cs typeface="Calibri" pitchFamily="34" charset="-120"/>
+              </a:rPr>
+              <a:t>4</a:t>
+            </a:r>
+            <a:endParaRPr lang="en-US" sz="1600" dirty="0"/>
+          </a:p>
+        </p:txBody>
+      </p:sp>
+      <p:sp>
+        <p:nvSpPr>
+          <p:cNvPr id="27" name="Text 25"/>
+          <p:cNvSpPr/>
+          <p:nvPr/>
+        </p:nvSpPr>
+        <p:spPr>
+          <a:xfrm>
+            <a:off x="1389888" y="4453128"/>
+            <a:ext cx="4389120" cy="365760"/>
+          </a:xfrm>
+          <a:prstGeom prst="rect">
+            <a:avLst/>
+          </a:prstGeom>
+          <a:noFill/>
+          <a:ln/>
+        </p:spPr>
+        <p:txBody>
+          <a:bodyPr wrap="square" lIns="0" tIns="0" rIns="0" bIns="0" rtlCol="0" anchor="ctr"/>
+          <a:lstStyle/>
+          <a:p>
+            <a:pPr indent="0" marL="0">
+              <a:buNone/>
+            </a:pPr>
+            <a:r>
+              <a:rPr lang="en-US" sz="1450" b="1" dirty="0">
+                <a:solidFill>
+                  <a:srgbClr val="0F2A43"/>
+                </a:solidFill>
+                <a:latin typeface="Georgia" pitchFamily="34" charset="0"/>
+                <a:ea typeface="Georgia" pitchFamily="34" charset="-122"/>
+                <a:cs typeface="Georgia" pitchFamily="34" charset="-120"/>
+              </a:rPr>
+              <a:t>Zapis --out report.html</a:t>
+            </a:r>
+            <a:endParaRPr lang="en-US" sz="1450" dirty="0"/>
+          </a:p>
+        </p:txBody>
+      </p:sp>
+      <p:sp>
+        <p:nvSpPr>
+          <p:cNvPr id="28" name="Text 26"/>
+          <p:cNvSpPr/>
+          <p:nvPr/>
+        </p:nvSpPr>
+        <p:spPr>
+          <a:xfrm>
+            <a:off x="1389888" y="4782312"/>
+            <a:ext cx="4389120" cy="292608"/>
+          </a:xfrm>
+          <a:prstGeom prst="rect">
+            <a:avLst/>
+          </a:prstGeom>
+          <a:noFill/>
+          <a:ln/>
+        </p:spPr>
+        <p:txBody>
+          <a:bodyPr wrap="square" lIns="0" tIns="0" rIns="0" bIns="0" rtlCol="0" anchor="ctr"/>
+          <a:lstStyle/>
+          <a:p>
+            <a:pPr indent="0" marL="0">
+              <a:buNone/>
+            </a:pPr>
+            <a:r>
+              <a:rPr lang="en-US" sz="1200" dirty="0">
+                <a:solidFill>
+                  <a:srgbClr val="64748B"/>
+                </a:solidFill>
+                <a:latin typeface="Calibri" pitchFamily="34" charset="0"/>
+                <a:ea typeface="Calibri" pitchFamily="34" charset="-122"/>
+                <a:cs typeface="Calibri" pitchFamily="34" charset="-120"/>
+              </a:rPr>
+              <a:t>samodzielny plik, otwierany w przeglądarce</a:t>
+            </a:r>
+            <a:endParaRPr lang="en-US" sz="1200" dirty="0"/>
+          </a:p>
+        </p:txBody>
+      </p:sp>
+      <p:sp>
+        <p:nvSpPr>
+          <p:cNvPr id="29" name="Text 27"/>
+          <p:cNvSpPr/>
+          <p:nvPr/>
+        </p:nvSpPr>
+        <p:spPr>
+          <a:xfrm>
+            <a:off x="548640" y="5349240"/>
+            <a:ext cx="5349240" cy="457200"/>
+          </a:xfrm>
+          <a:prstGeom prst="rect">
+            <a:avLst/>
+          </a:prstGeom>
+          <a:noFill/>
+          <a:ln/>
+        </p:spPr>
+        <p:txBody>
+          <a:bodyPr wrap="square" lIns="0" tIns="0" rIns="0" bIns="0" rtlCol="0" anchor="ctr"/>
+          <a:lstStyle/>
+          <a:p>
+            <a:pPr indent="0" marL="0">
+              <a:buNone/>
+            </a:pPr>
+            <a:r>
+              <a:rPr lang="en-US" sz="1250" i="1" dirty="0">
+                <a:solidFill>
+                  <a:srgbClr val="00A896"/>
+                </a:solidFill>
+                <a:latin typeface="Calibri" pitchFamily="34" charset="0"/>
+                <a:ea typeface="Calibri" pitchFamily="34" charset="-122"/>
+                <a:cs typeface="Calibri" pitchFamily="34" charset="-120"/>
+              </a:rPr>
+              <a:t>Jeden plik, bez JS-frameworków i zależności — lekki i czytelny.</a:t>
+            </a:r>
+            <a:endParaRPr lang="en-US" sz="1250" dirty="0"/>
+          </a:p>
+        </p:txBody>
+      </p:sp>
+      <p:sp>
+        <p:nvSpPr>
+          <p:cNvPr id="30" name="Shape 28"/>
+          <p:cNvSpPr/>
+          <p:nvPr/>
+        </p:nvSpPr>
+        <p:spPr>
+          <a:xfrm>
+            <a:off x="6355080" y="1874520"/>
+            <a:ext cx="5285232" cy="3977640"/>
+          </a:xfrm>
+          <a:prstGeom prst="rect">
+            <a:avLst/>
+          </a:prstGeom>
+          <a:solidFill>
+            <a:srgbClr val="FFFFFF"/>
+          </a:solidFill>
+          <a:ln w="12700">
             <a:solidFill>
-              <a:srgbClr val="00A896"/>
+              <a:srgbClr val="E2E4E8"/>
             </a:solidFill>
             <a:prstDash val="solid"/>
           </a:ln>
@@ -4601,94 +5465,94 @@
       </p:sp>
       <p:sp>
         <p:nvSpPr>
-          <p:cNvPr id="6" name="Shape 4"/>
-          <p:cNvSpPr/>
-          <p:nvPr/>
-        </p:nvSpPr>
-        <p:spPr>
-          <a:xfrm>
-            <a:off x="548640" y="1828800"/>
-            <a:ext cx="7040880" cy="310896"/>
+          <p:cNvPr id="31" name="Shape 29"/>
+          <p:cNvSpPr/>
+          <p:nvPr/>
+        </p:nvSpPr>
+        <p:spPr>
+          <a:xfrm>
+            <a:off x="6355080" y="1874520"/>
+            <a:ext cx="5285232" cy="310896"/>
           </a:xfrm>
           <a:prstGeom prst="rect">
             <a:avLst/>
           </a:prstGeom>
           <a:solidFill>
-            <a:srgbClr val="0F2A43"/>
+            <a:srgbClr val="F0F1F3"/>
           </a:solidFill>
           <a:ln/>
         </p:spPr>
       </p:sp>
       <p:sp>
         <p:nvSpPr>
-          <p:cNvPr id="7" name="Shape 5"/>
-          <p:cNvSpPr/>
-          <p:nvPr/>
-        </p:nvSpPr>
-        <p:spPr>
-          <a:xfrm>
-            <a:off x="731520" y="1920240"/>
-            <a:ext cx="128016" cy="128016"/>
+          <p:cNvPr id="32" name="Shape 30"/>
+          <p:cNvSpPr/>
+          <p:nvPr/>
+        </p:nvSpPr>
+        <p:spPr>
+          <a:xfrm>
+            <a:off x="6519672" y="1965960"/>
+            <a:ext cx="118872" cy="118872"/>
           </a:xfrm>
           <a:prstGeom prst="ellipse">
             <a:avLst/>
           </a:prstGeom>
           <a:solidFill>
-            <a:srgbClr val="E74C3C"/>
+            <a:srgbClr val="E5554E"/>
           </a:solidFill>
           <a:ln/>
         </p:spPr>
       </p:sp>
       <p:sp>
         <p:nvSpPr>
-          <p:cNvPr id="8" name="Shape 6"/>
-          <p:cNvSpPr/>
-          <p:nvPr/>
-        </p:nvSpPr>
-        <p:spPr>
-          <a:xfrm>
-            <a:off x="969264" y="1920240"/>
-            <a:ext cx="128016" cy="128016"/>
+          <p:cNvPr id="33" name="Shape 31"/>
+          <p:cNvSpPr/>
+          <p:nvPr/>
+        </p:nvSpPr>
+        <p:spPr>
+          <a:xfrm>
+            <a:off x="6739128" y="1965960"/>
+            <a:ext cx="118872" cy="118872"/>
           </a:xfrm>
           <a:prstGeom prst="ellipse">
             <a:avLst/>
           </a:prstGeom>
           <a:solidFill>
-            <a:srgbClr val="F1C40F"/>
+            <a:srgbClr val="E8B84B"/>
           </a:solidFill>
           <a:ln/>
         </p:spPr>
       </p:sp>
       <p:sp>
         <p:nvSpPr>
-          <p:cNvPr id="9" name="Shape 7"/>
-          <p:cNvSpPr/>
-          <p:nvPr/>
-        </p:nvSpPr>
-        <p:spPr>
-          <a:xfrm>
-            <a:off x="1207008" y="1920240"/>
-            <a:ext cx="128016" cy="128016"/>
+          <p:cNvPr id="34" name="Shape 32"/>
+          <p:cNvSpPr/>
+          <p:nvPr/>
+        </p:nvSpPr>
+        <p:spPr>
+          <a:xfrm>
+            <a:off x="6958584" y="1965960"/>
+            <a:ext cx="118872" cy="118872"/>
           </a:xfrm>
           <a:prstGeom prst="ellipse">
             <a:avLst/>
           </a:prstGeom>
           <a:solidFill>
-            <a:srgbClr val="00A896"/>
+            <a:srgbClr val="5BB16A"/>
           </a:solidFill>
           <a:ln/>
         </p:spPr>
       </p:sp>
       <p:sp>
         <p:nvSpPr>
-          <p:cNvPr id="10" name="Text 8"/>
-          <p:cNvSpPr/>
-          <p:nvPr/>
-        </p:nvSpPr>
-        <p:spPr>
-          <a:xfrm>
-            <a:off x="1554480" y="1847088"/>
-            <a:ext cx="5852160" cy="274320"/>
+          <p:cNvPr id="35" name="Text 33"/>
+          <p:cNvSpPr/>
+          <p:nvPr/>
+        </p:nvSpPr>
+        <p:spPr>
+          <a:xfrm>
+            <a:off x="7269480" y="1892808"/>
+            <a:ext cx="4187952" cy="274320"/>
           </a:xfrm>
           <a:prstGeom prst="rect">
             <a:avLst/>
@@ -4704,42 +5568,118 @@
               <a:buNone/>
             </a:pPr>
             <a:r>
-              <a:rPr lang="en-US" sz="1100" dirty="0">
-                <a:solidFill>
-                  <a:srgbClr val="8FA8C0"/>
-                </a:solidFill>
-                <a:latin typeface="Consolas" pitchFamily="34" charset="0"/>
-                <a:ea typeface="Consolas" pitchFamily="34" charset="-122"/>
-                <a:cs typeface="Consolas" pitchFamily="34" charset="-120"/>
-              </a:rPr>
-              <a:t>confrisk — demo.mp4</a:t>
-            </a:r>
-            <a:endParaRPr lang="en-US" sz="1100" dirty="0"/>
-          </a:p>
-        </p:txBody>
-      </p:sp>
-      <p:sp>
-        <p:nvSpPr>
-          <p:cNvPr id="11" name="Shape 9"/>
-          <p:cNvSpPr/>
-          <p:nvPr/>
-        </p:nvSpPr>
-        <p:spPr>
-          <a:xfrm>
-            <a:off x="3502152" y="3396996"/>
-            <a:ext cx="1133856" cy="1133856"/>
-          </a:xfrm>
-          <a:prstGeom prst="ellipse">
+              <a:rPr lang="en-US" sz="1000" dirty="0">
+                <a:solidFill>
+                  <a:srgbClr val="8A9099"/>
+                </a:solidFill>
+                <a:latin typeface="Calibri" pitchFamily="34" charset="0"/>
+                <a:ea typeface="Calibri" pitchFamily="34" charset="-122"/>
+                <a:cs typeface="Calibri" pitchFamily="34" charset="-120"/>
+              </a:rPr>
+              <a:t>report.html</a:t>
+            </a:r>
+            <a:endParaRPr lang="en-US" sz="1000" dirty="0"/>
+          </a:p>
+        </p:txBody>
+      </p:sp>
+      <p:sp>
+        <p:nvSpPr>
+          <p:cNvPr id="36" name="Text 34"/>
+          <p:cNvSpPr/>
+          <p:nvPr/>
+        </p:nvSpPr>
+        <p:spPr>
+          <a:xfrm>
+            <a:off x="6647688" y="2331720"/>
+            <a:ext cx="4736592" cy="320040"/>
+          </a:xfrm>
+          <a:prstGeom prst="rect">
+            <a:avLst/>
+          </a:prstGeom>
+          <a:noFill/>
+          <a:ln/>
+        </p:spPr>
+        <p:txBody>
+          <a:bodyPr wrap="square" lIns="0" tIns="0" rIns="0" bIns="0" rtlCol="0" anchor="ctr"/>
+          <a:lstStyle/>
+          <a:p>
+            <a:pPr indent="0" marL="0">
+              <a:buNone/>
+            </a:pPr>
+            <a:r>
+              <a:rPr lang="en-US" sz="1500" b="1" dirty="0">
+                <a:solidFill>
+                  <a:srgbClr val="20242A"/>
+                </a:solidFill>
+                <a:latin typeface="Georgia" pitchFamily="34" charset="0"/>
+                <a:ea typeface="Georgia" pitchFamily="34" charset="-122"/>
+                <a:cs typeface="Georgia" pitchFamily="34" charset="-120"/>
+              </a:rPr>
+              <a:t>Raport bezpieczeństwa</a:t>
+            </a:r>
+            <a:endParaRPr lang="en-US" sz="1500" dirty="0"/>
+          </a:p>
+        </p:txBody>
+      </p:sp>
+      <p:sp>
+        <p:nvSpPr>
+          <p:cNvPr id="37" name="Text 35"/>
+          <p:cNvSpPr/>
+          <p:nvPr/>
+        </p:nvSpPr>
+        <p:spPr>
+          <a:xfrm>
+            <a:off x="6647688" y="2651760"/>
+            <a:ext cx="4736592" cy="274320"/>
+          </a:xfrm>
+          <a:prstGeom prst="rect">
+            <a:avLst/>
+          </a:prstGeom>
+          <a:noFill/>
+          <a:ln/>
+        </p:spPr>
+        <p:txBody>
+          <a:bodyPr wrap="square" lIns="0" tIns="0" rIns="0" bIns="0" rtlCol="0" anchor="ctr"/>
+          <a:lstStyle/>
+          <a:p>
+            <a:pPr indent="0" marL="0">
+              <a:buNone/>
+            </a:pPr>
+            <a:r>
+              <a:rPr lang="en-US" sz="1000" dirty="0">
+                <a:solidFill>
+                  <a:srgbClr val="8A9099"/>
+                </a:solidFill>
+                <a:latin typeface="Calibri" pitchFamily="34" charset="0"/>
+                <a:ea typeface="Calibri" pitchFamily="34" charset="-122"/>
+                <a:cs typeface="Calibri" pitchFamily="34" charset="-120"/>
+              </a:rPr>
+              <a:t>Host macbook · profil production · kontroli 8</a:t>
+            </a:r>
+            <a:endParaRPr lang="en-US" sz="1000" dirty="0"/>
+          </a:p>
+        </p:txBody>
+      </p:sp>
+      <p:sp>
+        <p:nvSpPr>
+          <p:cNvPr id="38" name="Shape 36"/>
+          <p:cNvSpPr/>
+          <p:nvPr/>
+        </p:nvSpPr>
+        <p:spPr>
+          <a:xfrm>
+            <a:off x="6647688" y="2971800"/>
+            <a:ext cx="4700016" cy="868680"/>
+          </a:xfrm>
+          <a:prstGeom prst="rect">
             <a:avLst/>
           </a:prstGeom>
           <a:solidFill>
-            <a:srgbClr val="00A896">
-              <a:alpha val="88000"/>
-            </a:srgbClr>
+            <a:srgbClr val="F7F8F9"/>
           </a:solidFill>
-          <a:ln w="25400">
+          <a:ln w="9525">
             <a:solidFill>
-              <a:srgbClr val="FFFFFF"/>
+              <a:srgbClr val="E2E4E8"/>
             </a:solidFill>
             <a:prstDash val="solid"/>
           </a:ln>
@@ -4747,116 +5687,195 @@
       </p:sp>
       <p:sp>
         <p:nvSpPr>
-          <p:cNvPr id="12" name="Text 10"/>
-          <p:cNvSpPr/>
-          <p:nvPr/>
-        </p:nvSpPr>
-        <p:spPr>
-          <a:xfrm>
-            <a:off x="3611880" y="3415284"/>
-            <a:ext cx="914400" cy="1097280"/>
-          </a:xfrm>
-          <a:prstGeom prst="rect">
-            <a:avLst/>
-          </a:prstGeom>
-          <a:noFill/>
-          <a:ln/>
-        </p:spPr>
-        <p:txBody>
-          <a:bodyPr wrap="square" lIns="0" tIns="0" rIns="0" bIns="0" rtlCol="0" anchor="ctr"/>
-          <a:lstStyle/>
-          <a:p>
-            <a:pPr algn="ctr" indent="0" marL="0">
-              <a:buNone/>
-            </a:pPr>
-            <a:r>
-              <a:rPr lang="en-US" sz="4000" b="1" dirty="0">
-                <a:solidFill>
-                  <a:srgbClr val="FFFFFF"/>
+          <p:cNvPr id="39" name="Shape 37"/>
+          <p:cNvSpPr/>
+          <p:nvPr/>
+        </p:nvSpPr>
+        <p:spPr>
+          <a:xfrm>
+            <a:off x="6812280" y="3118104"/>
+            <a:ext cx="128016" cy="128016"/>
+          </a:xfrm>
+          <a:prstGeom prst="ellipse">
+            <a:avLst/>
+          </a:prstGeom>
+          <a:solidFill>
+            <a:srgbClr val="946800"/>
+          </a:solidFill>
+          <a:ln/>
+        </p:spPr>
+      </p:sp>
+      <p:sp>
+        <p:nvSpPr>
+          <p:cNvPr id="40" name="Text 38"/>
+          <p:cNvSpPr/>
+          <p:nvPr/>
+        </p:nvSpPr>
+        <p:spPr>
+          <a:xfrm>
+            <a:off x="7031736" y="3035808"/>
+            <a:ext cx="2743200" cy="274320"/>
+          </a:xfrm>
+          <a:prstGeom prst="rect">
+            <a:avLst/>
+          </a:prstGeom>
+          <a:noFill/>
+          <a:ln/>
+        </p:spPr>
+        <p:txBody>
+          <a:bodyPr wrap="square" lIns="0" tIns="0" rIns="0" bIns="0" rtlCol="0" anchor="ctr"/>
+          <a:lstStyle/>
+          <a:p>
+            <a:pPr indent="0" marL="0">
+              <a:buNone/>
+            </a:pPr>
+            <a:r>
+              <a:rPr lang="en-US" sz="1200" b="1" dirty="0">
+                <a:solidFill>
+                  <a:srgbClr val="20242A"/>
                 </a:solidFill>
                 <a:latin typeface="Calibri" pitchFamily="34" charset="0"/>
                 <a:ea typeface="Calibri" pitchFamily="34" charset="-122"/>
                 <a:cs typeface="Calibri" pitchFamily="34" charset="-120"/>
               </a:rPr>
-              <a:t>▶</a:t>
-            </a:r>
-            <a:endParaRPr lang="en-US" sz="4000" dirty="0"/>
-          </a:p>
-        </p:txBody>
-      </p:sp>
-      <p:sp>
-        <p:nvSpPr>
-          <p:cNvPr id="13" name="Text 11"/>
-          <p:cNvSpPr/>
-          <p:nvPr/>
-        </p:nvSpPr>
-        <p:spPr>
-          <a:xfrm>
-            <a:off x="822960" y="4604004"/>
-            <a:ext cx="6492240" cy="365760"/>
-          </a:xfrm>
-          <a:prstGeom prst="rect">
-            <a:avLst/>
-          </a:prstGeom>
-          <a:noFill/>
-          <a:ln/>
-        </p:spPr>
-        <p:txBody>
-          <a:bodyPr wrap="square" lIns="0" tIns="0" rIns="0" bIns="0" rtlCol="0" anchor="ctr"/>
-          <a:lstStyle/>
-          <a:p>
-            <a:pPr algn="ctr" indent="0" marL="0">
-              <a:buNone/>
-            </a:pPr>
-            <a:r>
-              <a:rPr lang="en-US" sz="1500" b="1" dirty="0">
-                <a:solidFill>
-                  <a:srgbClr val="CADCFC"/>
-                </a:solidFill>
-                <a:latin typeface="Georgia" pitchFamily="34" charset="0"/>
-                <a:ea typeface="Georgia" pitchFamily="34" charset="-122"/>
-                <a:cs typeface="Georgia" pitchFamily="34" charset="-120"/>
-              </a:rPr>
-              <a:t>Miejsce na film demo</a:t>
-            </a:r>
-            <a:endParaRPr lang="en-US" sz="1500" dirty="0"/>
-          </a:p>
-        </p:txBody>
-      </p:sp>
-      <p:sp>
-        <p:nvSpPr>
-          <p:cNvPr id="14" name="Text 12"/>
-          <p:cNvSpPr/>
-          <p:nvPr/>
-        </p:nvSpPr>
-        <p:spPr>
-          <a:xfrm>
-            <a:off x="822960" y="4951476"/>
-            <a:ext cx="6492240" cy="320040"/>
-          </a:xfrm>
-          <a:prstGeom prst="rect">
-            <a:avLst/>
-          </a:prstGeom>
-          <a:noFill/>
-          <a:ln/>
-        </p:spPr>
-        <p:txBody>
-          <a:bodyPr wrap="square" lIns="0" tIns="0" rIns="0" bIns="0" rtlCol="0" anchor="ctr"/>
-          <a:lstStyle/>
-          <a:p>
-            <a:pPr algn="ctr" indent="0" marL="0">
-              <a:buNone/>
-            </a:pPr>
-            <a:r>
-              <a:rPr lang="en-US" sz="1150" dirty="0">
-                <a:solidFill>
-                  <a:srgbClr val="8FA8C0"/>
+              <a:t>Do poprawy</a:t>
+            </a:r>
+            <a:endParaRPr lang="en-US" sz="1200" dirty="0"/>
+          </a:p>
+        </p:txBody>
+      </p:sp>
+      <p:sp>
+        <p:nvSpPr>
+          <p:cNvPr id="41" name="Text 39"/>
+          <p:cNvSpPr/>
+          <p:nvPr/>
+        </p:nvSpPr>
+        <p:spPr>
+          <a:xfrm>
+            <a:off x="6812280" y="3355848"/>
+            <a:ext cx="4462272" cy="365760"/>
+          </a:xfrm>
+          <a:prstGeom prst="rect">
+            <a:avLst/>
+          </a:prstGeom>
+          <a:noFill/>
+          <a:ln/>
+        </p:spPr>
+        <p:txBody>
+          <a:bodyPr wrap="square" lIns="0" tIns="0" rIns="0" bIns="0" rtlCol="0" anchor="ctr"/>
+          <a:lstStyle/>
+          <a:p>
+            <a:pPr indent="0" marL="0">
+              <a:buNone/>
+            </a:pPr>
+            <a:r>
+              <a:rPr lang="en-US" sz="1150" b="1" dirty="0">
+                <a:solidFill>
+                  <a:srgbClr val="20242A"/>
                 </a:solidFill>
                 <a:latin typeface="Calibri" pitchFamily="34" charset="0"/>
                 <a:ea typeface="Calibri" pitchFamily="34" charset="-122"/>
                 <a:cs typeface="Calibri" pitchFamily="34" charset="-120"/>
               </a:rPr>
-              <a:t>PowerPoint: Wstaw → Wideo (lub przeciągnij plik .mp4 na ten obszar)</a:t>
+              <a:t>0 </a:t>
+            </a:r>
+            <a:pPr indent="0" marL="0">
+              <a:buNone/>
+            </a:pPr>
+            <a:r>
+              <a:rPr lang="en-US" sz="1150" dirty="0">
+                <a:solidFill>
+                  <a:srgbClr val="8A9099"/>
+                </a:solidFill>
+                <a:latin typeface="Calibri" pitchFamily="34" charset="0"/>
+                <a:ea typeface="Calibri" pitchFamily="34" charset="-122"/>
+                <a:cs typeface="Calibri" pitchFamily="34" charset="-120"/>
+              </a:rPr>
+              <a:t>kryt.   </a:t>
+            </a:r>
+            <a:pPr indent="0" marL="0">
+              <a:buNone/>
+            </a:pPr>
+            <a:r>
+              <a:rPr lang="en-US" sz="1150" b="1" dirty="0">
+                <a:solidFill>
+                  <a:srgbClr val="20242A"/>
+                </a:solidFill>
+                <a:latin typeface="Calibri" pitchFamily="34" charset="0"/>
+                <a:ea typeface="Calibri" pitchFamily="34" charset="-122"/>
+                <a:cs typeface="Calibri" pitchFamily="34" charset="-120"/>
+              </a:rPr>
+              <a:t>1 </a:t>
+            </a:r>
+            <a:pPr indent="0" marL="0">
+              <a:buNone/>
+            </a:pPr>
+            <a:r>
+              <a:rPr lang="en-US" sz="1150" dirty="0">
+                <a:solidFill>
+                  <a:srgbClr val="8A9099"/>
+                </a:solidFill>
+                <a:latin typeface="Calibri" pitchFamily="34" charset="0"/>
+                <a:ea typeface="Calibri" pitchFamily="34" charset="-122"/>
+                <a:cs typeface="Calibri" pitchFamily="34" charset="-120"/>
+              </a:rPr>
+              <a:t>wys.   </a:t>
+            </a:r>
+            <a:pPr indent="0" marL="0">
+              <a:buNone/>
+            </a:pPr>
+            <a:r>
+              <a:rPr lang="en-US" sz="1150" b="1" dirty="0">
+                <a:solidFill>
+                  <a:srgbClr val="20242A"/>
+                </a:solidFill>
+                <a:latin typeface="Calibri" pitchFamily="34" charset="0"/>
+                <a:ea typeface="Calibri" pitchFamily="34" charset="-122"/>
+                <a:cs typeface="Calibri" pitchFamily="34" charset="-120"/>
+              </a:rPr>
+              <a:t>1 </a:t>
+            </a:r>
+            <a:pPr indent="0" marL="0">
+              <a:buNone/>
+            </a:pPr>
+            <a:r>
+              <a:rPr lang="en-US" sz="1150" dirty="0">
+                <a:solidFill>
+                  <a:srgbClr val="8A9099"/>
+                </a:solidFill>
+                <a:latin typeface="Calibri" pitchFamily="34" charset="0"/>
+                <a:ea typeface="Calibri" pitchFamily="34" charset="-122"/>
+                <a:cs typeface="Calibri" pitchFamily="34" charset="-120"/>
+              </a:rPr>
+              <a:t>śr.   </a:t>
+            </a:r>
+            <a:pPr indent="0" marL="0">
+              <a:buNone/>
+            </a:pPr>
+            <a:r>
+              <a:rPr lang="en-US" sz="1150" b="1" dirty="0">
+                <a:solidFill>
+                  <a:srgbClr val="20242A"/>
+                </a:solidFill>
+                <a:latin typeface="Calibri" pitchFamily="34" charset="0"/>
+                <a:ea typeface="Calibri" pitchFamily="34" charset="-122"/>
+                <a:cs typeface="Calibri" pitchFamily="34" charset="-120"/>
+              </a:rPr>
+              <a:t>6 </a:t>
+            </a:r>
+            <a:pPr indent="0" marL="0">
+              <a:buNone/>
+            </a:pPr>
+            <a:r>
+              <a:rPr lang="en-US" sz="1150" dirty="0">
+                <a:solidFill>
+                  <a:srgbClr val="8A9099"/>
+                </a:solidFill>
+                <a:latin typeface="Calibri" pitchFamily="34" charset="0"/>
+                <a:ea typeface="Calibri" pitchFamily="34" charset="-122"/>
+                <a:cs typeface="Calibri" pitchFamily="34" charset="-120"/>
+              </a:rPr>
+              <a:t>zal.</a:t>
             </a:r>
             <a:endParaRPr lang="en-US" sz="1150" dirty="0"/>
           </a:p>
@@ -4864,14 +5883,14 @@
       </p:sp>
       <p:sp>
         <p:nvSpPr>
-          <p:cNvPr id="15" name="Shape 13"/>
-          <p:cNvSpPr/>
-          <p:nvPr/>
-        </p:nvSpPr>
-        <p:spPr>
-          <a:xfrm>
-            <a:off x="7772400" y="1828800"/>
-            <a:ext cx="3867912" cy="3959352"/>
+          <p:cNvPr id="42" name="Shape 40"/>
+          <p:cNvSpPr/>
+          <p:nvPr/>
+        </p:nvSpPr>
+        <p:spPr>
+          <a:xfrm>
+            <a:off x="6647688" y="4069080"/>
+            <a:ext cx="4700016" cy="566928"/>
           </a:xfrm>
           <a:prstGeom prst="rect">
             <a:avLst/>
@@ -4879,261 +5898,314 @@
           <a:solidFill>
             <a:srgbClr val="FFFFFF"/>
           </a:solidFill>
-          <a:ln/>
-          <a:effectLst>
-            <a:outerShdw sx="100000" sy="100000" kx="0" ky="0" algn="bl" rotWithShape="0" blurRad="114300" dist="38100" dir="8100000">
-              <a:srgbClr val="0F2A43">
-                <a:alpha val="14000"/>
-              </a:srgbClr>
-            </a:outerShdw>
-          </a:effectLst>
-        </p:spPr>
-      </p:sp>
-      <p:sp>
-        <p:nvSpPr>
-          <p:cNvPr id="16" name="Shape 14"/>
-          <p:cNvSpPr/>
-          <p:nvPr/>
-        </p:nvSpPr>
-        <p:spPr>
-          <a:xfrm>
-            <a:off x="7772400" y="1828800"/>
-            <a:ext cx="82296" cy="3959352"/>
-          </a:xfrm>
-          <a:prstGeom prst="rect">
-            <a:avLst/>
-          </a:prstGeom>
-          <a:solidFill>
-            <a:srgbClr val="00A896"/>
-          </a:solidFill>
-          <a:ln/>
-        </p:spPr>
-      </p:sp>
-      <p:sp>
-        <p:nvSpPr>
-          <p:cNvPr id="17" name="Text 15"/>
-          <p:cNvSpPr/>
-          <p:nvPr/>
-        </p:nvSpPr>
-        <p:spPr>
-          <a:xfrm>
-            <a:off x="8065008" y="1993392"/>
-            <a:ext cx="3319272" cy="411480"/>
-          </a:xfrm>
-          <a:prstGeom prst="rect">
-            <a:avLst/>
-          </a:prstGeom>
-          <a:noFill/>
-          <a:ln/>
-        </p:spPr>
-        <p:txBody>
-          <a:bodyPr wrap="square" lIns="0" tIns="0" rIns="0" bIns="0" rtlCol="0" anchor="ctr"/>
-          <a:lstStyle/>
-          <a:p>
-            <a:pPr indent="0" marL="0">
-              <a:buNone/>
-            </a:pPr>
-            <a:r>
-              <a:rPr lang="en-US" sz="1700" b="1" dirty="0">
-                <a:solidFill>
-                  <a:srgbClr val="0F2A43"/>
-                </a:solidFill>
-                <a:latin typeface="Georgia" pitchFamily="34" charset="0"/>
-                <a:ea typeface="Georgia" pitchFamily="34" charset="-122"/>
-                <a:cs typeface="Georgia" pitchFamily="34" charset="-120"/>
-              </a:rPr>
-              <a:t>Co pokazuje demo</a:t>
-            </a:r>
-            <a:endParaRPr lang="en-US" sz="1700" dirty="0"/>
-          </a:p>
-        </p:txBody>
-      </p:sp>
-      <p:sp>
-        <p:nvSpPr>
-          <p:cNvPr id="18" name="Text 16"/>
-          <p:cNvSpPr/>
-          <p:nvPr/>
-        </p:nvSpPr>
-        <p:spPr>
-          <a:xfrm>
-            <a:off x="8065008" y="2468880"/>
-            <a:ext cx="3300984" cy="2468880"/>
-          </a:xfrm>
-          <a:prstGeom prst="rect">
-            <a:avLst/>
-          </a:prstGeom>
-          <a:noFill/>
-          <a:ln/>
-        </p:spPr>
-        <p:txBody>
-          <a:bodyPr wrap="square" lIns="0" tIns="0" rIns="0" bIns="0" rtlCol="0" anchor="ctr"/>
-          <a:lstStyle/>
-          <a:p>
-            <a:pPr marL="342900" indent="-342900">
-              <a:spcAft>
-                <a:spcPts val="1000"/>
-              </a:spcAft>
-              <a:buSzPct val="100000"/>
-              <a:buChar char="•"/>
-            </a:pPr>
-            <a:r>
-              <a:rPr lang="en-US" sz="1350" dirty="0">
-                <a:solidFill>
-                  <a:srgbClr val="1E293B"/>
+          <a:ln w="9525">
+            <a:solidFill>
+              <a:srgbClr val="E2E4E8"/>
+            </a:solidFill>
+            <a:prstDash val="solid"/>
+          </a:ln>
+        </p:spPr>
+      </p:sp>
+      <p:sp>
+        <p:nvSpPr>
+          <p:cNvPr id="43" name="Text 41"/>
+          <p:cNvSpPr/>
+          <p:nvPr/>
+        </p:nvSpPr>
+        <p:spPr>
+          <a:xfrm>
+            <a:off x="6739128" y="4069080"/>
+            <a:ext cx="274320" cy="566928"/>
+          </a:xfrm>
+          <a:prstGeom prst="rect">
+            <a:avLst/>
+          </a:prstGeom>
+          <a:noFill/>
+          <a:ln/>
+        </p:spPr>
+        <p:txBody>
+          <a:bodyPr wrap="square" lIns="0" tIns="0" rIns="0" bIns="0" rtlCol="0" anchor="ctr"/>
+          <a:lstStyle/>
+          <a:p>
+            <a:pPr indent="0" marL="0">
+              <a:buNone/>
+            </a:pPr>
+            <a:r>
+              <a:rPr lang="en-US" sz="1100" dirty="0">
+                <a:solidFill>
+                  <a:srgbClr val="8A9099"/>
                 </a:solidFill>
                 <a:latin typeface="Calibri" pitchFamily="34" charset="0"/>
                 <a:ea typeface="Calibri" pitchFamily="34" charset="-122"/>
                 <a:cs typeface="Calibri" pitchFamily="34" charset="-120"/>
               </a:rPr>
-              <a:t>Skan projektu: confrisk-npm --path .</a:t>
-            </a:r>
-            <a:endParaRPr lang="en-US" sz="1350" dirty="0"/>
-          </a:p>
-          <a:p>
-            <a:pPr marL="342900" indent="-342900">
-              <a:spcAft>
-                <a:spcPts val="1000"/>
-              </a:spcAft>
-              <a:buSzPct val="100000"/>
-              <a:buChar char="•"/>
-            </a:pPr>
-            <a:r>
-              <a:rPr lang="en-US" sz="1350" dirty="0">
-                <a:solidFill>
-                  <a:srgbClr val="1E293B"/>
+              <a:t>▸</a:t>
+            </a:r>
+            <a:endParaRPr lang="en-US" sz="1100" dirty="0"/>
+          </a:p>
+        </p:txBody>
+      </p:sp>
+      <p:sp>
+        <p:nvSpPr>
+          <p:cNvPr id="44" name="Shape 42"/>
+          <p:cNvSpPr/>
+          <p:nvPr/>
+        </p:nvSpPr>
+        <p:spPr>
+          <a:xfrm>
+            <a:off x="7031736" y="4233672"/>
+            <a:ext cx="868680" cy="237744"/>
+          </a:xfrm>
+          <a:prstGeom prst="roundRect">
+            <a:avLst>
+              <a:gd name="adj" fmla="val 19231"/>
+            </a:avLst>
+          </a:prstGeom>
+          <a:solidFill>
+            <a:srgbClr val="FDF0E6"/>
+          </a:solidFill>
+          <a:ln/>
+        </p:spPr>
+      </p:sp>
+      <p:sp>
+        <p:nvSpPr>
+          <p:cNvPr id="45" name="Text 43"/>
+          <p:cNvSpPr/>
+          <p:nvPr/>
+        </p:nvSpPr>
+        <p:spPr>
+          <a:xfrm>
+            <a:off x="7031736" y="4215384"/>
+            <a:ext cx="868680" cy="256032"/>
+          </a:xfrm>
+          <a:prstGeom prst="rect">
+            <a:avLst/>
+          </a:prstGeom>
+          <a:noFill/>
+          <a:ln/>
+        </p:spPr>
+        <p:txBody>
+          <a:bodyPr wrap="square" lIns="0" tIns="0" rIns="0" bIns="0" rtlCol="0" anchor="ctr"/>
+          <a:lstStyle/>
+          <a:p>
+            <a:pPr algn="ctr" indent="0" marL="0">
+              <a:buNone/>
+            </a:pPr>
+            <a:r>
+              <a:rPr lang="en-US" sz="900" b="1" dirty="0">
+                <a:solidFill>
+                  <a:srgbClr val="B54708"/>
                 </a:solidFill>
                 <a:latin typeface="Calibri" pitchFamily="34" charset="0"/>
                 <a:ea typeface="Calibri" pitchFamily="34" charset="-122"/>
                 <a:cs typeface="Calibri" pitchFamily="34" charset="-120"/>
               </a:rPr>
-              <a:t>Wykrycie pakietu z blocklisty i npm audit</a:t>
-            </a:r>
-            <a:endParaRPr lang="en-US" sz="1350" dirty="0"/>
-          </a:p>
-          <a:p>
-            <a:pPr marL="342900" indent="-342900">
-              <a:spcAft>
-                <a:spcPts val="1000"/>
-              </a:spcAft>
-              <a:buSzPct val="100000"/>
-              <a:buChar char="•"/>
-            </a:pPr>
-            <a:r>
-              <a:rPr lang="en-US" sz="1350" dirty="0">
-                <a:solidFill>
-                  <a:srgbClr val="1E293B"/>
+              <a:t>Wysokie</a:t>
+            </a:r>
+            <a:endParaRPr lang="en-US" sz="900" dirty="0"/>
+          </a:p>
+        </p:txBody>
+      </p:sp>
+      <p:sp>
+        <p:nvSpPr>
+          <p:cNvPr id="46" name="Text 44"/>
+          <p:cNvSpPr/>
+          <p:nvPr/>
+        </p:nvSpPr>
+        <p:spPr>
+          <a:xfrm>
+            <a:off x="8019288" y="4069080"/>
+            <a:ext cx="3090672" cy="566928"/>
+          </a:xfrm>
+          <a:prstGeom prst="rect">
+            <a:avLst/>
+          </a:prstGeom>
+          <a:noFill/>
+          <a:ln/>
+        </p:spPr>
+        <p:txBody>
+          <a:bodyPr wrap="square" lIns="0" tIns="0" rIns="0" bIns="0" rtlCol="0" anchor="ctr"/>
+          <a:lstStyle/>
+          <a:p>
+            <a:pPr indent="0" marL="0">
+              <a:buNone/>
+            </a:pPr>
+            <a:r>
+              <a:rPr lang="en-US" sz="1100" b="1" dirty="0">
+                <a:solidFill>
+                  <a:srgbClr val="20242A"/>
                 </a:solidFill>
                 <a:latin typeface="Calibri" pitchFamily="34" charset="0"/>
                 <a:ea typeface="Calibri" pitchFamily="34" charset="-122"/>
                 <a:cs typeface="Calibri" pitchFamily="34" charset="-120"/>
               </a:rPr>
-              <a:t>--fail-on high --exit-code blokuje commit</a:t>
-            </a:r>
-            <a:endParaRPr lang="en-US" sz="1350" dirty="0"/>
-          </a:p>
-          <a:p>
-            <a:pPr marL="342900" indent="-342900">
-              <a:spcAft>
-                <a:spcPts val="1000"/>
-              </a:spcAft>
-              <a:buSzPct val="100000"/>
-              <a:buChar char="•"/>
-            </a:pPr>
-            <a:r>
-              <a:rPr lang="en-US" sz="1350" dirty="0">
-                <a:solidFill>
-                  <a:srgbClr val="1E293B"/>
+              <a:t>SSH root login permitted</a:t>
+            </a:r>
+            <a:endParaRPr lang="en-US" sz="1100" dirty="0"/>
+          </a:p>
+        </p:txBody>
+      </p:sp>
+      <p:sp>
+        <p:nvSpPr>
+          <p:cNvPr id="47" name="Shape 45"/>
+          <p:cNvSpPr/>
+          <p:nvPr/>
+        </p:nvSpPr>
+        <p:spPr>
+          <a:xfrm>
+            <a:off x="6647688" y="4727448"/>
+            <a:ext cx="4700016" cy="457200"/>
+          </a:xfrm>
+          <a:prstGeom prst="rect">
+            <a:avLst/>
+          </a:prstGeom>
+          <a:solidFill>
+            <a:srgbClr val="FFFFFF"/>
+          </a:solidFill>
+          <a:ln w="9525">
+            <a:solidFill>
+              <a:srgbClr val="E2E4E8"/>
+            </a:solidFill>
+            <a:prstDash val="solid"/>
+          </a:ln>
+        </p:spPr>
+      </p:sp>
+      <p:sp>
+        <p:nvSpPr>
+          <p:cNvPr id="48" name="Text 46"/>
+          <p:cNvSpPr/>
+          <p:nvPr/>
+        </p:nvSpPr>
+        <p:spPr>
+          <a:xfrm>
+            <a:off x="6739128" y="4727448"/>
+            <a:ext cx="274320" cy="457200"/>
+          </a:xfrm>
+          <a:prstGeom prst="rect">
+            <a:avLst/>
+          </a:prstGeom>
+          <a:noFill/>
+          <a:ln/>
+        </p:spPr>
+        <p:txBody>
+          <a:bodyPr wrap="square" lIns="0" tIns="0" rIns="0" bIns="0" rtlCol="0" anchor="ctr"/>
+          <a:lstStyle/>
+          <a:p>
+            <a:pPr indent="0" marL="0">
+              <a:buNone/>
+            </a:pPr>
+            <a:r>
+              <a:rPr lang="en-US" sz="1100" dirty="0">
+                <a:solidFill>
+                  <a:srgbClr val="8A9099"/>
                 </a:solidFill>
                 <a:latin typeface="Calibri" pitchFamily="34" charset="0"/>
                 <a:ea typeface="Calibri" pitchFamily="34" charset="-122"/>
                 <a:cs typeface="Calibri" pitchFamily="34" charset="-120"/>
               </a:rPr>
-              <a:t>Wyjście JSON w pipeline CI/CD</a:t>
-            </a:r>
-            <a:endParaRPr lang="en-US" sz="1350" dirty="0"/>
-          </a:p>
-          <a:p>
-            <a:pPr marL="342900" indent="-342900">
-              <a:spcAft>
-                <a:spcPts val="1000"/>
-              </a:spcAft>
-              <a:buSzPct val="100000"/>
-              <a:buChar char="•"/>
-            </a:pPr>
-            <a:r>
-              <a:rPr lang="en-US" sz="1350" dirty="0">
-                <a:solidFill>
-                  <a:srgbClr val="1E293B"/>
+              <a:t>▸</a:t>
+            </a:r>
+            <a:endParaRPr lang="en-US" sz="1100" dirty="0"/>
+          </a:p>
+        </p:txBody>
+      </p:sp>
+      <p:sp>
+        <p:nvSpPr>
+          <p:cNvPr id="49" name="Shape 47"/>
+          <p:cNvSpPr/>
+          <p:nvPr/>
+        </p:nvSpPr>
+        <p:spPr>
+          <a:xfrm>
+            <a:off x="7031736" y="4846320"/>
+            <a:ext cx="868680" cy="219456"/>
+          </a:xfrm>
+          <a:prstGeom prst="roundRect">
+            <a:avLst>
+              <a:gd name="adj" fmla="val 20833"/>
+            </a:avLst>
+          </a:prstGeom>
+          <a:solidFill>
+            <a:srgbClr val="E7F3E8"/>
+          </a:solidFill>
+          <a:ln/>
+        </p:spPr>
+      </p:sp>
+      <p:sp>
+        <p:nvSpPr>
+          <p:cNvPr id="50" name="Text 48"/>
+          <p:cNvSpPr/>
+          <p:nvPr/>
+        </p:nvSpPr>
+        <p:spPr>
+          <a:xfrm>
+            <a:off x="7031736" y="4828032"/>
+            <a:ext cx="868680" cy="237744"/>
+          </a:xfrm>
+          <a:prstGeom prst="rect">
+            <a:avLst/>
+          </a:prstGeom>
+          <a:noFill/>
+          <a:ln/>
+        </p:spPr>
+        <p:txBody>
+          <a:bodyPr wrap="square" lIns="0" tIns="0" rIns="0" bIns="0" rtlCol="0" anchor="ctr"/>
+          <a:lstStyle/>
+          <a:p>
+            <a:pPr algn="ctr" indent="0" marL="0">
+              <a:buNone/>
+            </a:pPr>
+            <a:r>
+              <a:rPr lang="en-US" sz="900" b="1" dirty="0">
+                <a:solidFill>
+                  <a:srgbClr val="2E7D32"/>
                 </a:solidFill>
                 <a:latin typeface="Calibri" pitchFamily="34" charset="0"/>
                 <a:ea typeface="Calibri" pitchFamily="34" charset="-122"/>
                 <a:cs typeface="Calibri" pitchFamily="34" charset="-120"/>
               </a:rPr>
-              <a:t>Ten sam skan, różne profile --asset</a:t>
-            </a:r>
-            <a:endParaRPr lang="en-US" sz="1350" dirty="0"/>
-          </a:p>
-        </p:txBody>
-      </p:sp>
-      <p:sp>
-        <p:nvSpPr>
-          <p:cNvPr id="19" name="Shape 17"/>
-          <p:cNvSpPr/>
-          <p:nvPr/>
-        </p:nvSpPr>
-        <p:spPr>
-          <a:xfrm>
-            <a:off x="8065008" y="5074920"/>
-            <a:ext cx="3282696" cy="0"/>
-          </a:xfrm>
-          <a:prstGeom prst="line">
-            <a:avLst/>
-          </a:prstGeom>
-          <a:noFill/>
-          <a:ln w="12700">
-            <a:solidFill>
-              <a:srgbClr val="D9E1EC"/>
-            </a:solidFill>
-            <a:prstDash val="solid"/>
-          </a:ln>
-        </p:spPr>
-      </p:sp>
-      <p:sp>
-        <p:nvSpPr>
-          <p:cNvPr id="20" name="Text 18"/>
-          <p:cNvSpPr/>
-          <p:nvPr/>
-        </p:nvSpPr>
-        <p:spPr>
-          <a:xfrm>
-            <a:off x="8065008" y="5193792"/>
-            <a:ext cx="3319272" cy="457200"/>
-          </a:xfrm>
-          <a:prstGeom prst="rect">
-            <a:avLst/>
-          </a:prstGeom>
-          <a:noFill/>
-          <a:ln/>
-        </p:spPr>
-        <p:txBody>
-          <a:bodyPr wrap="square" lIns="0" tIns="0" rIns="0" bIns="0" rtlCol="0" anchor="ctr"/>
-          <a:lstStyle/>
-          <a:p>
-            <a:pPr indent="0" marL="0">
-              <a:buNone/>
-            </a:pPr>
-            <a:r>
-              <a:rPr lang="en-US" sz="1150" i="1" dirty="0">
-                <a:solidFill>
-                  <a:srgbClr val="64748B"/>
+              <a:t>Zaliczone</a:t>
+            </a:r>
+            <a:endParaRPr lang="en-US" sz="900" dirty="0"/>
+          </a:p>
+        </p:txBody>
+      </p:sp>
+      <p:sp>
+        <p:nvSpPr>
+          <p:cNvPr id="51" name="Text 49"/>
+          <p:cNvSpPr/>
+          <p:nvPr/>
+        </p:nvSpPr>
+        <p:spPr>
+          <a:xfrm>
+            <a:off x="8019288" y="4727448"/>
+            <a:ext cx="3090672" cy="457200"/>
+          </a:xfrm>
+          <a:prstGeom prst="rect">
+            <a:avLst/>
+          </a:prstGeom>
+          <a:noFill/>
+          <a:ln/>
+        </p:spPr>
+        <p:txBody>
+          <a:bodyPr wrap="square" lIns="0" tIns="0" rIns="0" bIns="0" rtlCol="0" anchor="ctr"/>
+          <a:lstStyle/>
+          <a:p>
+            <a:pPr indent="0" marL="0">
+              <a:buNone/>
+            </a:pPr>
+            <a:r>
+              <a:rPr lang="en-US" sz="1100" dirty="0">
+                <a:solidFill>
+                  <a:srgbClr val="5B6470"/>
                 </a:solidFill>
                 <a:latin typeface="Calibri" pitchFamily="34" charset="0"/>
                 <a:ea typeface="Calibri" pitchFamily="34" charset="-122"/>
                 <a:cs typeface="Calibri" pitchFamily="34" charset="-120"/>
               </a:rPr>
-              <a:t>Link do nagrania:  ________________________</a:t>
-            </a:r>
-            <a:endParaRPr lang="en-US" sz="1150" dirty="0"/>
+              <a:t>Shadow file permissions</a:t>
+            </a:r>
+            <a:endParaRPr lang="en-US" sz="1100" dirty="0"/>
           </a:p>
         </p:txBody>
       </p:sp>
@@ -5224,7 +6296,7 @@
                 <a:ea typeface="Calibri" pitchFamily="34" charset="-122"/>
                 <a:cs typeface="Calibri" pitchFamily="34" charset="-120"/>
               </a:rPr>
-              <a:t>JAKOŚĆ</a:t>
+              <a:t>DEMO</a:t>
             </a:r>
             <a:endParaRPr lang="en-US" sz="1200" dirty="0"/>
           </a:p>
@@ -5263,7 +6335,7 @@
                 <a:ea typeface="Georgia" pitchFamily="34" charset="-122"/>
                 <a:cs typeface="Georgia" pitchFamily="34" charset="-120"/>
               </a:rPr>
-              <a:t>Testy i decyzje projektowe</a:t>
+              <a:t>Demo — zobacz, jak to działa</a:t>
             </a:r>
             <a:endParaRPr lang="en-US" sz="3000" dirty="0"/>
           </a:p>
@@ -5271,37 +6343,739 @@
       </p:sp>
       <p:sp>
         <p:nvSpPr>
-          <p:cNvPr id="5" name="Text 3"/>
+          <p:cNvPr id="5" name="Shape 3"/>
           <p:cNvSpPr/>
           <p:nvPr/>
         </p:nvSpPr>
         <p:spPr>
           <a:xfrm>
             <a:off x="548640" y="1828800"/>
-            <a:ext cx="10058400" cy="365760"/>
-          </a:xfrm>
-          <a:prstGeom prst="rect">
-            <a:avLst/>
-          </a:prstGeom>
-          <a:noFill/>
-          <a:ln/>
-        </p:spPr>
-        <p:txBody>
-          <a:bodyPr wrap="square" lIns="0" tIns="0" rIns="0" bIns="0" rtlCol="0" anchor="ctr"/>
-          <a:lstStyle/>
-          <a:p>
-            <a:pPr indent="0" marL="0">
-              <a:buNone/>
-            </a:pPr>
-            <a:r>
-              <a:rPr lang="en-US" sz="1600" b="1" dirty="0">
-                <a:solidFill>
-                  <a:srgbClr val="0F2A43"/>
+            <a:ext cx="7040880" cy="3959352"/>
+          </a:xfrm>
+          <a:prstGeom prst="rect">
+            <a:avLst/>
+          </a:prstGeom>
+          <a:solidFill>
+            <a:srgbClr val="10243A"/>
+          </a:solidFill>
+          <a:ln w="19050">
+            <a:solidFill>
+              <a:srgbClr val="00A896"/>
+            </a:solidFill>
+            <a:prstDash val="solid"/>
+          </a:ln>
+          <a:effectLst>
+            <a:outerShdw sx="100000" sy="100000" kx="0" ky="0" algn="bl" rotWithShape="0" blurRad="114300" dist="38100" dir="8100000">
+              <a:srgbClr val="0F2A43">
+                <a:alpha val="14000"/>
+              </a:srgbClr>
+            </a:outerShdw>
+          </a:effectLst>
+        </p:spPr>
+      </p:sp>
+      <p:sp>
+        <p:nvSpPr>
+          <p:cNvPr id="6" name="Shape 4"/>
+          <p:cNvSpPr/>
+          <p:nvPr/>
+        </p:nvSpPr>
+        <p:spPr>
+          <a:xfrm>
+            <a:off x="548640" y="1828800"/>
+            <a:ext cx="7040880" cy="310896"/>
+          </a:xfrm>
+          <a:prstGeom prst="rect">
+            <a:avLst/>
+          </a:prstGeom>
+          <a:solidFill>
+            <a:srgbClr val="0F2A43"/>
+          </a:solidFill>
+          <a:ln/>
+        </p:spPr>
+      </p:sp>
+      <p:sp>
+        <p:nvSpPr>
+          <p:cNvPr id="7" name="Shape 5"/>
+          <p:cNvSpPr/>
+          <p:nvPr/>
+        </p:nvSpPr>
+        <p:spPr>
+          <a:xfrm>
+            <a:off x="731520" y="1920240"/>
+            <a:ext cx="128016" cy="128016"/>
+          </a:xfrm>
+          <a:prstGeom prst="ellipse">
+            <a:avLst/>
+          </a:prstGeom>
+          <a:solidFill>
+            <a:srgbClr val="E74C3C"/>
+          </a:solidFill>
+          <a:ln/>
+        </p:spPr>
+      </p:sp>
+      <p:sp>
+        <p:nvSpPr>
+          <p:cNvPr id="8" name="Shape 6"/>
+          <p:cNvSpPr/>
+          <p:nvPr/>
+        </p:nvSpPr>
+        <p:spPr>
+          <a:xfrm>
+            <a:off x="969264" y="1920240"/>
+            <a:ext cx="128016" cy="128016"/>
+          </a:xfrm>
+          <a:prstGeom prst="ellipse">
+            <a:avLst/>
+          </a:prstGeom>
+          <a:solidFill>
+            <a:srgbClr val="F1C40F"/>
+          </a:solidFill>
+          <a:ln/>
+        </p:spPr>
+      </p:sp>
+      <p:sp>
+        <p:nvSpPr>
+          <p:cNvPr id="9" name="Shape 7"/>
+          <p:cNvSpPr/>
+          <p:nvPr/>
+        </p:nvSpPr>
+        <p:spPr>
+          <a:xfrm>
+            <a:off x="1207008" y="1920240"/>
+            <a:ext cx="128016" cy="128016"/>
+          </a:xfrm>
+          <a:prstGeom prst="ellipse">
+            <a:avLst/>
+          </a:prstGeom>
+          <a:solidFill>
+            <a:srgbClr val="00A896"/>
+          </a:solidFill>
+          <a:ln/>
+        </p:spPr>
+      </p:sp>
+      <p:sp>
+        <p:nvSpPr>
+          <p:cNvPr id="10" name="Text 8"/>
+          <p:cNvSpPr/>
+          <p:nvPr/>
+        </p:nvSpPr>
+        <p:spPr>
+          <a:xfrm>
+            <a:off x="1554480" y="1847088"/>
+            <a:ext cx="5852160" cy="274320"/>
+          </a:xfrm>
+          <a:prstGeom prst="rect">
+            <a:avLst/>
+          </a:prstGeom>
+          <a:noFill/>
+          <a:ln/>
+        </p:spPr>
+        <p:txBody>
+          <a:bodyPr wrap="square" lIns="0" tIns="0" rIns="0" bIns="0" rtlCol="0" anchor="ctr"/>
+          <a:lstStyle/>
+          <a:p>
+            <a:pPr algn="ctr" indent="0" marL="0">
+              <a:buNone/>
+            </a:pPr>
+            <a:r>
+              <a:rPr lang="en-US" sz="1100" dirty="0">
+                <a:solidFill>
+                  <a:srgbClr val="8FA8C0"/>
+                </a:solidFill>
+                <a:latin typeface="Consolas" pitchFamily="34" charset="0"/>
+                <a:ea typeface="Consolas" pitchFamily="34" charset="-122"/>
+                <a:cs typeface="Consolas" pitchFamily="34" charset="-120"/>
+              </a:rPr>
+              <a:t>confrisk — demo.mp4</a:t>
+            </a:r>
+            <a:endParaRPr lang="en-US" sz="1100" dirty="0"/>
+          </a:p>
+        </p:txBody>
+      </p:sp>
+      <p:sp>
+        <p:nvSpPr>
+          <p:cNvPr id="11" name="Shape 9"/>
+          <p:cNvSpPr/>
+          <p:nvPr/>
+        </p:nvSpPr>
+        <p:spPr>
+          <a:xfrm>
+            <a:off x="3502152" y="3396996"/>
+            <a:ext cx="1133856" cy="1133856"/>
+          </a:xfrm>
+          <a:prstGeom prst="ellipse">
+            <a:avLst/>
+          </a:prstGeom>
+          <a:solidFill>
+            <a:srgbClr val="00A896">
+              <a:alpha val="88000"/>
+            </a:srgbClr>
+          </a:solidFill>
+          <a:ln w="25400">
+            <a:solidFill>
+              <a:srgbClr val="FFFFFF"/>
+            </a:solidFill>
+            <a:prstDash val="solid"/>
+          </a:ln>
+        </p:spPr>
+      </p:sp>
+      <p:sp>
+        <p:nvSpPr>
+          <p:cNvPr id="12" name="Text 10"/>
+          <p:cNvSpPr/>
+          <p:nvPr/>
+        </p:nvSpPr>
+        <p:spPr>
+          <a:xfrm>
+            <a:off x="3611880" y="3415284"/>
+            <a:ext cx="914400" cy="1097280"/>
+          </a:xfrm>
+          <a:prstGeom prst="rect">
+            <a:avLst/>
+          </a:prstGeom>
+          <a:noFill/>
+          <a:ln/>
+        </p:spPr>
+        <p:txBody>
+          <a:bodyPr wrap="square" lIns="0" tIns="0" rIns="0" bIns="0" rtlCol="0" anchor="ctr"/>
+          <a:lstStyle/>
+          <a:p>
+            <a:pPr algn="ctr" indent="0" marL="0">
+              <a:buNone/>
+            </a:pPr>
+            <a:r>
+              <a:rPr lang="en-US" sz="4000" b="1" dirty="0">
+                <a:solidFill>
+                  <a:srgbClr val="FFFFFF"/>
+                </a:solidFill>
+                <a:latin typeface="Calibri" pitchFamily="34" charset="0"/>
+                <a:ea typeface="Calibri" pitchFamily="34" charset="-122"/>
+                <a:cs typeface="Calibri" pitchFamily="34" charset="-120"/>
+              </a:rPr>
+              <a:t>▶</a:t>
+            </a:r>
+            <a:endParaRPr lang="en-US" sz="4000" dirty="0"/>
+          </a:p>
+        </p:txBody>
+      </p:sp>
+      <p:sp>
+        <p:nvSpPr>
+          <p:cNvPr id="13" name="Text 11"/>
+          <p:cNvSpPr/>
+          <p:nvPr/>
+        </p:nvSpPr>
+        <p:spPr>
+          <a:xfrm>
+            <a:off x="822960" y="4604004"/>
+            <a:ext cx="6492240" cy="365760"/>
+          </a:xfrm>
+          <a:prstGeom prst="rect">
+            <a:avLst/>
+          </a:prstGeom>
+          <a:noFill/>
+          <a:ln/>
+        </p:spPr>
+        <p:txBody>
+          <a:bodyPr wrap="square" lIns="0" tIns="0" rIns="0" bIns="0" rtlCol="0" anchor="ctr"/>
+          <a:lstStyle/>
+          <a:p>
+            <a:pPr algn="ctr" indent="0" marL="0">
+              <a:buNone/>
+            </a:pPr>
+            <a:r>
+              <a:rPr lang="en-US" sz="1500" b="1" dirty="0">
+                <a:solidFill>
+                  <a:srgbClr val="CADCFC"/>
                 </a:solidFill>
                 <a:latin typeface="Georgia" pitchFamily="34" charset="0"/>
                 <a:ea typeface="Georgia" pitchFamily="34" charset="-122"/>
                 <a:cs typeface="Georgia" pitchFamily="34" charset="-120"/>
               </a:rPr>
+              <a:t>Miejsce na film demo</a:t>
+            </a:r>
+            <a:endParaRPr lang="en-US" sz="1500" dirty="0"/>
+          </a:p>
+        </p:txBody>
+      </p:sp>
+      <p:sp>
+        <p:nvSpPr>
+          <p:cNvPr id="14" name="Text 12"/>
+          <p:cNvSpPr/>
+          <p:nvPr/>
+        </p:nvSpPr>
+        <p:spPr>
+          <a:xfrm>
+            <a:off x="822960" y="4951476"/>
+            <a:ext cx="6492240" cy="320040"/>
+          </a:xfrm>
+          <a:prstGeom prst="rect">
+            <a:avLst/>
+          </a:prstGeom>
+          <a:noFill/>
+          <a:ln/>
+        </p:spPr>
+        <p:txBody>
+          <a:bodyPr wrap="square" lIns="0" tIns="0" rIns="0" bIns="0" rtlCol="0" anchor="ctr"/>
+          <a:lstStyle/>
+          <a:p>
+            <a:pPr algn="ctr" indent="0" marL="0">
+              <a:buNone/>
+            </a:pPr>
+            <a:r>
+              <a:rPr lang="en-US" sz="1150" dirty="0">
+                <a:solidFill>
+                  <a:srgbClr val="8FA8C0"/>
+                </a:solidFill>
+                <a:latin typeface="Calibri" pitchFamily="34" charset="0"/>
+                <a:ea typeface="Calibri" pitchFamily="34" charset="-122"/>
+                <a:cs typeface="Calibri" pitchFamily="34" charset="-120"/>
+              </a:rPr>
+              <a:t>PowerPoint: Wstaw → Wideo (lub przeciągnij plik .mp4 na ten obszar)</a:t>
+            </a:r>
+            <a:endParaRPr lang="en-US" sz="1150" dirty="0"/>
+          </a:p>
+        </p:txBody>
+      </p:sp>
+      <p:sp>
+        <p:nvSpPr>
+          <p:cNvPr id="15" name="Shape 13"/>
+          <p:cNvSpPr/>
+          <p:nvPr/>
+        </p:nvSpPr>
+        <p:spPr>
+          <a:xfrm>
+            <a:off x="7772400" y="1828800"/>
+            <a:ext cx="3867912" cy="3959352"/>
+          </a:xfrm>
+          <a:prstGeom prst="rect">
+            <a:avLst/>
+          </a:prstGeom>
+          <a:solidFill>
+            <a:srgbClr val="FFFFFF"/>
+          </a:solidFill>
+          <a:ln/>
+          <a:effectLst>
+            <a:outerShdw sx="100000" sy="100000" kx="0" ky="0" algn="bl" rotWithShape="0" blurRad="114300" dist="38100" dir="8100000">
+              <a:srgbClr val="0F2A43">
+                <a:alpha val="14000"/>
+              </a:srgbClr>
+            </a:outerShdw>
+          </a:effectLst>
+        </p:spPr>
+      </p:sp>
+      <p:sp>
+        <p:nvSpPr>
+          <p:cNvPr id="16" name="Shape 14"/>
+          <p:cNvSpPr/>
+          <p:nvPr/>
+        </p:nvSpPr>
+        <p:spPr>
+          <a:xfrm>
+            <a:off x="7772400" y="1828800"/>
+            <a:ext cx="82296" cy="3959352"/>
+          </a:xfrm>
+          <a:prstGeom prst="rect">
+            <a:avLst/>
+          </a:prstGeom>
+          <a:solidFill>
+            <a:srgbClr val="00A896"/>
+          </a:solidFill>
+          <a:ln/>
+        </p:spPr>
+      </p:sp>
+      <p:sp>
+        <p:nvSpPr>
+          <p:cNvPr id="17" name="Text 15"/>
+          <p:cNvSpPr/>
+          <p:nvPr/>
+        </p:nvSpPr>
+        <p:spPr>
+          <a:xfrm>
+            <a:off x="8065008" y="1993392"/>
+            <a:ext cx="3319272" cy="411480"/>
+          </a:xfrm>
+          <a:prstGeom prst="rect">
+            <a:avLst/>
+          </a:prstGeom>
+          <a:noFill/>
+          <a:ln/>
+        </p:spPr>
+        <p:txBody>
+          <a:bodyPr wrap="square" lIns="0" tIns="0" rIns="0" bIns="0" rtlCol="0" anchor="ctr"/>
+          <a:lstStyle/>
+          <a:p>
+            <a:pPr indent="0" marL="0">
+              <a:buNone/>
+            </a:pPr>
+            <a:r>
+              <a:rPr lang="en-US" sz="1700" b="1" dirty="0">
+                <a:solidFill>
+                  <a:srgbClr val="0F2A43"/>
+                </a:solidFill>
+                <a:latin typeface="Georgia" pitchFamily="34" charset="0"/>
+                <a:ea typeface="Georgia" pitchFamily="34" charset="-122"/>
+                <a:cs typeface="Georgia" pitchFamily="34" charset="-120"/>
+              </a:rPr>
+              <a:t>Co pokazuje demo</a:t>
+            </a:r>
+            <a:endParaRPr lang="en-US" sz="1700" dirty="0"/>
+          </a:p>
+        </p:txBody>
+      </p:sp>
+      <p:sp>
+        <p:nvSpPr>
+          <p:cNvPr id="18" name="Text 16"/>
+          <p:cNvSpPr/>
+          <p:nvPr/>
+        </p:nvSpPr>
+        <p:spPr>
+          <a:xfrm>
+            <a:off x="8065008" y="2468880"/>
+            <a:ext cx="3300984" cy="2468880"/>
+          </a:xfrm>
+          <a:prstGeom prst="rect">
+            <a:avLst/>
+          </a:prstGeom>
+          <a:noFill/>
+          <a:ln/>
+        </p:spPr>
+        <p:txBody>
+          <a:bodyPr wrap="square" lIns="0" tIns="0" rIns="0" bIns="0" rtlCol="0" anchor="ctr"/>
+          <a:lstStyle/>
+          <a:p>
+            <a:pPr marL="342900" indent="-342900">
+              <a:spcAft>
+                <a:spcPts val="1000"/>
+              </a:spcAft>
+              <a:buSzPct val="100000"/>
+              <a:buChar char="•"/>
+            </a:pPr>
+            <a:r>
+              <a:rPr lang="en-US" sz="1350" dirty="0">
+                <a:solidFill>
+                  <a:srgbClr val="1E293B"/>
+                </a:solidFill>
+                <a:latin typeface="Calibri" pitchFamily="34" charset="0"/>
+                <a:ea typeface="Calibri" pitchFamily="34" charset="-122"/>
+                <a:cs typeface="Calibri" pitchFamily="34" charset="-120"/>
+              </a:rPr>
+              <a:t>Skan projektu: confrisk-npm --path .</a:t>
+            </a:r>
+            <a:endParaRPr lang="en-US" sz="1350" dirty="0"/>
+          </a:p>
+          <a:p>
+            <a:pPr marL="342900" indent="-342900">
+              <a:spcAft>
+                <a:spcPts val="1000"/>
+              </a:spcAft>
+              <a:buSzPct val="100000"/>
+              <a:buChar char="•"/>
+            </a:pPr>
+            <a:r>
+              <a:rPr lang="en-US" sz="1350" dirty="0">
+                <a:solidFill>
+                  <a:srgbClr val="1E293B"/>
+                </a:solidFill>
+                <a:latin typeface="Calibri" pitchFamily="34" charset="0"/>
+                <a:ea typeface="Calibri" pitchFamily="34" charset="-122"/>
+                <a:cs typeface="Calibri" pitchFamily="34" charset="-120"/>
+              </a:rPr>
+              <a:t>Wykrycie pakietu z blocklisty i npm audit</a:t>
+            </a:r>
+            <a:endParaRPr lang="en-US" sz="1350" dirty="0"/>
+          </a:p>
+          <a:p>
+            <a:pPr marL="342900" indent="-342900">
+              <a:spcAft>
+                <a:spcPts val="1000"/>
+              </a:spcAft>
+              <a:buSzPct val="100000"/>
+              <a:buChar char="•"/>
+            </a:pPr>
+            <a:r>
+              <a:rPr lang="en-US" sz="1350" dirty="0">
+                <a:solidFill>
+                  <a:srgbClr val="1E293B"/>
+                </a:solidFill>
+                <a:latin typeface="Calibri" pitchFamily="34" charset="0"/>
+                <a:ea typeface="Calibri" pitchFamily="34" charset="-122"/>
+                <a:cs typeface="Calibri" pitchFamily="34" charset="-120"/>
+              </a:rPr>
+              <a:t>--fail-on high --exit-code blokuje commit</a:t>
+            </a:r>
+            <a:endParaRPr lang="en-US" sz="1350" dirty="0"/>
+          </a:p>
+          <a:p>
+            <a:pPr marL="342900" indent="-342900">
+              <a:spcAft>
+                <a:spcPts val="1000"/>
+              </a:spcAft>
+              <a:buSzPct val="100000"/>
+              <a:buChar char="•"/>
+            </a:pPr>
+            <a:r>
+              <a:rPr lang="en-US" sz="1350" dirty="0">
+                <a:solidFill>
+                  <a:srgbClr val="1E293B"/>
+                </a:solidFill>
+                <a:latin typeface="Calibri" pitchFamily="34" charset="0"/>
+                <a:ea typeface="Calibri" pitchFamily="34" charset="-122"/>
+                <a:cs typeface="Calibri" pitchFamily="34" charset="-120"/>
+              </a:rPr>
+              <a:t>Wyjście JSON w pipeline CI/CD</a:t>
+            </a:r>
+            <a:endParaRPr lang="en-US" sz="1350" dirty="0"/>
+          </a:p>
+          <a:p>
+            <a:pPr marL="342900" indent="-342900">
+              <a:spcAft>
+                <a:spcPts val="1000"/>
+              </a:spcAft>
+              <a:buSzPct val="100000"/>
+              <a:buChar char="•"/>
+            </a:pPr>
+            <a:r>
+              <a:rPr lang="en-US" sz="1350" dirty="0">
+                <a:solidFill>
+                  <a:srgbClr val="1E293B"/>
+                </a:solidFill>
+                <a:latin typeface="Calibri" pitchFamily="34" charset="0"/>
+                <a:ea typeface="Calibri" pitchFamily="34" charset="-122"/>
+                <a:cs typeface="Calibri" pitchFamily="34" charset="-120"/>
+              </a:rPr>
+              <a:t>Ten sam skan, różne profile --asset</a:t>
+            </a:r>
+            <a:endParaRPr lang="en-US" sz="1350" dirty="0"/>
+          </a:p>
+        </p:txBody>
+      </p:sp>
+      <p:sp>
+        <p:nvSpPr>
+          <p:cNvPr id="19" name="Shape 17"/>
+          <p:cNvSpPr/>
+          <p:nvPr/>
+        </p:nvSpPr>
+        <p:spPr>
+          <a:xfrm>
+            <a:off x="8065008" y="5074920"/>
+            <a:ext cx="3282696" cy="0"/>
+          </a:xfrm>
+          <a:prstGeom prst="line">
+            <a:avLst/>
+          </a:prstGeom>
+          <a:noFill/>
+          <a:ln w="12700">
+            <a:solidFill>
+              <a:srgbClr val="D9E1EC"/>
+            </a:solidFill>
+            <a:prstDash val="solid"/>
+          </a:ln>
+        </p:spPr>
+      </p:sp>
+      <p:sp>
+        <p:nvSpPr>
+          <p:cNvPr id="20" name="Text 18"/>
+          <p:cNvSpPr/>
+          <p:nvPr/>
+        </p:nvSpPr>
+        <p:spPr>
+          <a:xfrm>
+            <a:off x="8065008" y="5193792"/>
+            <a:ext cx="3319272" cy="457200"/>
+          </a:xfrm>
+          <a:prstGeom prst="rect">
+            <a:avLst/>
+          </a:prstGeom>
+          <a:noFill/>
+          <a:ln/>
+        </p:spPr>
+        <p:txBody>
+          <a:bodyPr wrap="square" lIns="0" tIns="0" rIns="0" bIns="0" rtlCol="0" anchor="ctr"/>
+          <a:lstStyle/>
+          <a:p>
+            <a:pPr indent="0" marL="0">
+              <a:buNone/>
+            </a:pPr>
+            <a:r>
+              <a:rPr lang="en-US" sz="1150" i="1" dirty="0">
+                <a:solidFill>
+                  <a:srgbClr val="64748B"/>
+                </a:solidFill>
+                <a:latin typeface="Calibri" pitchFamily="34" charset="0"/>
+                <a:ea typeface="Calibri" pitchFamily="34" charset="-122"/>
+                <a:cs typeface="Calibri" pitchFamily="34" charset="-120"/>
+              </a:rPr>
+              <a:t>Link do nagrania:  ________________________</a:t>
+            </a:r>
+            <a:endParaRPr lang="en-US" sz="1150" dirty="0"/>
+          </a:p>
+        </p:txBody>
+      </p:sp>
+    </p:spTree>
+  </p:cSld>
+  <p:clrMapOvr>
+    <a:masterClrMapping/>
+  </p:clrMapOvr>
+</p:sld>
+</file>
+
+<file path=ppt/slides/slide15.xml><?xml version="1.0" encoding="utf-8"?>
+<p:sld xmlns:a="http://schemas.openxmlformats.org/drawingml/2006/main" xmlns:r="http://schemas.openxmlformats.org/officeDocument/2006/relationships" xmlns:p="http://schemas.openxmlformats.org/presentationml/2006/main">
+  <p:cSld name="Slide 15">
+    <p:bg>
+      <p:bgPr>
+        <a:solidFill>
+          <a:srgbClr val="F4F7FA"/>
+        </a:solidFill>
+      </p:bgPr>
+    </p:bg>
+    <p:spTree>
+      <p:nvGrpSpPr>
+        <p:cNvPr id="1" name=""/>
+        <p:cNvGrpSpPr/>
+        <p:nvPr/>
+      </p:nvGrpSpPr>
+      <p:grpSpPr>
+        <a:xfrm>
+          <a:off x="0" y="0"/>
+          <a:ext cx="0" cy="0"/>
+          <a:chOff x="0" y="0"/>
+          <a:chExt cx="0" cy="0"/>
+        </a:xfrm>
+      </p:grpSpPr>
+      <p:sp>
+        <p:nvSpPr>
+          <p:cNvPr id="2" name="Shape 0"/>
+          <p:cNvSpPr/>
+          <p:nvPr/>
+        </p:nvSpPr>
+        <p:spPr>
+          <a:xfrm>
+            <a:off x="548640" y="411480"/>
+            <a:ext cx="201168" cy="420624"/>
+          </a:xfrm>
+          <a:prstGeom prst="roundRect">
+            <a:avLst>
+              <a:gd name="adj" fmla="val 27273"/>
+            </a:avLst>
+          </a:prstGeom>
+          <a:solidFill>
+            <a:srgbClr val="00A896"/>
+          </a:solidFill>
+          <a:ln/>
+        </p:spPr>
+      </p:sp>
+      <p:sp>
+        <p:nvSpPr>
+          <p:cNvPr id="3" name="Text 1"/>
+          <p:cNvSpPr/>
+          <p:nvPr/>
+        </p:nvSpPr>
+        <p:spPr>
+          <a:xfrm>
+            <a:off x="841248" y="411480"/>
+            <a:ext cx="8229600" cy="420624"/>
+          </a:xfrm>
+          <a:prstGeom prst="rect">
+            <a:avLst/>
+          </a:prstGeom>
+          <a:noFill/>
+          <a:ln/>
+        </p:spPr>
+        <p:txBody>
+          <a:bodyPr wrap="square" lIns="0" tIns="0" rIns="0" bIns="0" rtlCol="0" anchor="ctr"/>
+          <a:lstStyle/>
+          <a:p>
+            <a:pPr indent="0" marL="0">
+              <a:buNone/>
+            </a:pPr>
+            <a:r>
+              <a:rPr lang="en-US" sz="1200" b="1" spc="300" kern="0" dirty="0">
+                <a:solidFill>
+                  <a:srgbClr val="00A896"/>
+                </a:solidFill>
+                <a:latin typeface="Calibri" pitchFamily="34" charset="0"/>
+                <a:ea typeface="Calibri" pitchFamily="34" charset="-122"/>
+                <a:cs typeface="Calibri" pitchFamily="34" charset="-120"/>
+              </a:rPr>
+              <a:t>JAKOŚĆ</a:t>
+            </a:r>
+            <a:endParaRPr lang="en-US" sz="1200" dirty="0"/>
+          </a:p>
+        </p:txBody>
+      </p:sp>
+      <p:sp>
+        <p:nvSpPr>
+          <p:cNvPr id="4" name="Text 2"/>
+          <p:cNvSpPr/>
+          <p:nvPr/>
+        </p:nvSpPr>
+        <p:spPr>
+          <a:xfrm>
+            <a:off x="548640" y="786384"/>
+            <a:ext cx="11091672" cy="749808"/>
+          </a:xfrm>
+          <a:prstGeom prst="rect">
+            <a:avLst/>
+          </a:prstGeom>
+          <a:noFill/>
+          <a:ln/>
+        </p:spPr>
+        <p:txBody>
+          <a:bodyPr wrap="square" lIns="0" tIns="0" rIns="0" bIns="0" rtlCol="0" anchor="ctr"/>
+          <a:lstStyle/>
+          <a:p>
+            <a:pPr indent="0" marL="0">
+              <a:buNone/>
+            </a:pPr>
+            <a:r>
+              <a:rPr lang="en-US" sz="3000" b="1" dirty="0">
+                <a:solidFill>
+                  <a:srgbClr val="0F2A43"/>
+                </a:solidFill>
+                <a:latin typeface="Georgia" pitchFamily="34" charset="0"/>
+                <a:ea typeface="Georgia" pitchFamily="34" charset="-122"/>
+                <a:cs typeface="Georgia" pitchFamily="34" charset="-120"/>
+              </a:rPr>
+              <a:t>Testy i decyzje projektowe</a:t>
+            </a:r>
+            <a:endParaRPr lang="en-US" sz="3000" dirty="0"/>
+          </a:p>
+        </p:txBody>
+      </p:sp>
+      <p:sp>
+        <p:nvSpPr>
+          <p:cNvPr id="5" name="Text 3"/>
+          <p:cNvSpPr/>
+          <p:nvPr/>
+        </p:nvSpPr>
+        <p:spPr>
+          <a:xfrm>
+            <a:off x="548640" y="1828800"/>
+            <a:ext cx="10058400" cy="365760"/>
+          </a:xfrm>
+          <a:prstGeom prst="rect">
+            <a:avLst/>
+          </a:prstGeom>
+          <a:noFill/>
+          <a:ln/>
+        </p:spPr>
+        <p:txBody>
+          <a:bodyPr wrap="square" lIns="0" tIns="0" rIns="0" bIns="0" rtlCol="0" anchor="ctr"/>
+          <a:lstStyle/>
+          <a:p>
+            <a:pPr indent="0" marL="0">
+              <a:buNone/>
+            </a:pPr>
+            <a:r>
+              <a:rPr lang="en-US" sz="1600" b="1" dirty="0">
+                <a:solidFill>
+                  <a:srgbClr val="0F2A43"/>
+                </a:solidFill>
+                <a:latin typeface="Georgia" pitchFamily="34" charset="0"/>
+                <a:ea typeface="Georgia" pitchFamily="34" charset="-122"/>
+                <a:cs typeface="Georgia" pitchFamily="34" charset="-120"/>
+              </a:rPr>
               <a:t>Testy jednostkowe resolvera konfiguracji</a:t>
             </a:r>
             <a:endParaRPr lang="en-US" sz="1600" dirty="0"/>
@@ -5310,7 +7084,7 @@
       </p:sp>
       <p:graphicFrame>
         <p:nvGraphicFramePr>
-          <p:cNvPr id="15" name="Table 0"/>
+          <p:cNvPr id="16" name="Table 0"/>
           <p:cNvGraphicFramePr>
             <a:graphicFrameLocks noGrp="1"/>
           </p:cNvGraphicFramePr>
@@ -6398,9 +8172,9 @@
 </p:sld>
 </file>
 
-<file path=ppt/slides/slide15.xml><?xml version="1.0" encoding="utf-8"?>
+<file path=ppt/slides/slide16.xml><?xml version="1.0" encoding="utf-8"?>
 <p:sld xmlns:a="http://schemas.openxmlformats.org/drawingml/2006/main" xmlns:r="http://schemas.openxmlformats.org/officeDocument/2006/relationships" xmlns:p="http://schemas.openxmlformats.org/presentationml/2006/main">
-  <p:cSld name="Slide 15">
+  <p:cSld name="Slide 16">
     <p:bg>
       <p:bgPr>
         <a:solidFill>

--- a/docs/Prezentacja_confrisk.pptx
+++ b/docs/Prezentacja_confrisk.pptx
@@ -5,7 +5,7 @@
     <p:sldMasterId id="2147483648" r:id="rId1"/>
   </p:sldMasterIdLst>
   <p:notesMasterIdLst>
-    <p:notesMasterId r:id="rId16"/>
+    <p:notesMasterId r:id="rId17"/>
   </p:notesMasterIdLst>
   <p:sldIdLst>
     <p:sldId id="256" r:id="rId2"/>
@@ -22,6 +22,7 @@
     <p:sldId id="268" r:id="rId13"/>
     <p:sldId id="269" r:id="rId14"/>
     <p:sldId id="271" r:id="rId15"/>
+    <p:sldId id="272" r:id="rId16"/>
   </p:sldIdLst>
   <p:sldSz cx="12192000" cy="6858000"/>
   <p:notesSz cx="6858000" cy="12192000"/>
@@ -1041,6 +1042,114 @@
     <p:extLst>
       <p:ext uri="{BB962C8B-B14F-4D97-AF65-F5344CB8AC3E}">
         <p14:creationId xmlns:p14="http://schemas.microsoft.com/office/powerpoint/2010/main" val="1024086991"/>
+      </p:ext>
+    </p:extLst>
+  </p:cSld>
+  <p:clrMapOvr>
+    <a:masterClrMapping/>
+  </p:clrMapOvr>
+</p:notes>
+</file>
+
+<file path=ppt/notesSlides/notesSlide15.xml><?xml version="1.0" encoding="utf-8"?>
+<p:notes xmlns:a="http://schemas.openxmlformats.org/drawingml/2006/main" xmlns:r="http://schemas.openxmlformats.org/officeDocument/2006/relationships" xmlns:p="http://schemas.openxmlformats.org/presentationml/2006/main">
+  <p:cSld>
+    <p:spTree>
+      <p:nvGrpSpPr>
+        <p:cNvPr id="1" name="">
+          <a:extLst>
+            <a:ext uri="{FF2B5EF4-FFF2-40B4-BE49-F238E27FC236}">
+              <a16:creationId xmlns:a16="http://schemas.microsoft.com/office/drawing/2014/main" id="{E33D008F-474D-2676-4F83-188B49AB1EB0}"/>
+            </a:ext>
+          </a:extLst>
+        </p:cNvPr>
+        <p:cNvGrpSpPr/>
+        <p:nvPr/>
+      </p:nvGrpSpPr>
+      <p:grpSpPr>
+        <a:xfrm>
+          <a:off x="0" y="0"/>
+          <a:ext cx="0" cy="0"/>
+          <a:chOff x="0" y="0"/>
+          <a:chExt cx="0" cy="0"/>
+        </a:xfrm>
+      </p:grpSpPr>
+      <p:sp>
+        <p:nvSpPr>
+          <p:cNvPr id="2" name="Slide Image Placeholder 1">
+            <a:extLst>
+              <a:ext uri="{FF2B5EF4-FFF2-40B4-BE49-F238E27FC236}">
+                <a16:creationId xmlns:a16="http://schemas.microsoft.com/office/drawing/2014/main" id="{A86205D6-4B17-436F-29AD-ABFA641FC181}"/>
+              </a:ext>
+            </a:extLst>
+          </p:cNvPr>
+          <p:cNvSpPr>
+            <a:spLocks noGrp="1" noRot="1" noChangeAspect="1"/>
+          </p:cNvSpPr>
+          <p:nvPr>
+            <p:ph type="sldImg"/>
+          </p:nvPr>
+        </p:nvSpPr>
+        <p:spPr/>
+      </p:sp>
+      <p:sp>
+        <p:nvSpPr>
+          <p:cNvPr id="3" name="Notes Placeholder 2">
+            <a:extLst>
+              <a:ext uri="{FF2B5EF4-FFF2-40B4-BE49-F238E27FC236}">
+                <a16:creationId xmlns:a16="http://schemas.microsoft.com/office/drawing/2014/main" id="{CF0FAC71-7048-8A31-8BEE-36090ABCD6E8}"/>
+              </a:ext>
+            </a:extLst>
+          </p:cNvPr>
+          <p:cNvSpPr>
+            <a:spLocks noGrp="1"/>
+          </p:cNvSpPr>
+          <p:nvPr>
+            <p:ph type="body" idx="1"/>
+          </p:nvPr>
+        </p:nvSpPr>
+        <p:spPr/>
+        <p:txBody>
+          <a:bodyPr/>
+          <a:lstStyle/>
+          <a:p>
+            <a:endParaRPr lang="en-US" dirty="0"/>
+          </a:p>
+        </p:txBody>
+      </p:sp>
+      <p:sp>
+        <p:nvSpPr>
+          <p:cNvPr id="4" name="Slide Number Placeholder 3">
+            <a:extLst>
+              <a:ext uri="{FF2B5EF4-FFF2-40B4-BE49-F238E27FC236}">
+                <a16:creationId xmlns:a16="http://schemas.microsoft.com/office/drawing/2014/main" id="{E85499A3-0A7B-5F7E-F2E4-518E7B321C6C}"/>
+              </a:ext>
+            </a:extLst>
+          </p:cNvPr>
+          <p:cNvSpPr>
+            <a:spLocks noGrp="1"/>
+          </p:cNvSpPr>
+          <p:nvPr>
+            <p:ph type="sldNum" sz="quarter" idx="10"/>
+          </p:nvPr>
+        </p:nvSpPr>
+        <p:spPr/>
+        <p:txBody>
+          <a:bodyPr/>
+          <a:lstStyle/>
+          <a:p>
+            <a:fld id="{F7021451-1387-4CA6-816F-3879F97B5CBC}" type="slidenum">
+              <a:rPr lang="en-US"/>
+              <a:t>15</a:t>
+            </a:fld>
+            <a:endParaRPr lang="en-US"/>
+          </a:p>
+        </p:txBody>
+      </p:sp>
+    </p:spTree>
+    <p:extLst>
+      <p:ext uri="{BB962C8B-B14F-4D97-AF65-F5344CB8AC3E}">
+        <p14:creationId xmlns:p14="http://schemas.microsoft.com/office/powerpoint/2010/main" val="756845313"/>
       </p:ext>
     </p:extLst>
   </p:cSld>
@@ -5855,6 +5964,186 @@
         </p:txBody>
       </p:sp>
     </p:spTree>
+  </p:cSld>
+  <p:clrMapOvr>
+    <a:masterClrMapping/>
+  </p:clrMapOvr>
+</p:sld>
+</file>
+
+<file path=ppt/slides/slide15.xml><?xml version="1.0" encoding="utf-8"?>
+<p:sld xmlns:a="http://schemas.openxmlformats.org/drawingml/2006/main" xmlns:r="http://schemas.openxmlformats.org/officeDocument/2006/relationships" xmlns:p="http://schemas.openxmlformats.org/presentationml/2006/main">
+  <p:cSld>
+    <p:bg>
+      <p:bgPr>
+        <a:solidFill>
+          <a:srgbClr val="0F2A43"/>
+        </a:solidFill>
+        <a:effectLst/>
+      </p:bgPr>
+    </p:bg>
+    <p:spTree>
+      <p:nvGrpSpPr>
+        <p:cNvPr id="1" name="">
+          <a:extLst>
+            <a:ext uri="{FF2B5EF4-FFF2-40B4-BE49-F238E27FC236}">
+              <a16:creationId xmlns:a16="http://schemas.microsoft.com/office/drawing/2014/main" id="{7A673AAB-DC02-ECED-4161-C94CEDC4A11F}"/>
+            </a:ext>
+          </a:extLst>
+        </p:cNvPr>
+        <p:cNvGrpSpPr/>
+        <p:nvPr/>
+      </p:nvGrpSpPr>
+      <p:grpSpPr>
+        <a:xfrm>
+          <a:off x="0" y="0"/>
+          <a:ext cx="0" cy="0"/>
+          <a:chOff x="0" y="0"/>
+          <a:chExt cx="0" cy="0"/>
+        </a:xfrm>
+      </p:grpSpPr>
+      <p:sp>
+        <p:nvSpPr>
+          <p:cNvPr id="2" name="Shape 0">
+            <a:extLst>
+              <a:ext uri="{FF2B5EF4-FFF2-40B4-BE49-F238E27FC236}">
+                <a16:creationId xmlns:a16="http://schemas.microsoft.com/office/drawing/2014/main" id="{36E42D42-CCFF-4850-3E55-F4F0114394EE}"/>
+              </a:ext>
+            </a:extLst>
+          </p:cNvPr>
+          <p:cNvSpPr/>
+          <p:nvPr/>
+        </p:nvSpPr>
+        <p:spPr>
+          <a:xfrm>
+            <a:off x="0" y="0"/>
+            <a:ext cx="256032" cy="6858000"/>
+          </a:xfrm>
+          <a:prstGeom prst="rect">
+            <a:avLst/>
+          </a:prstGeom>
+          <a:solidFill>
+            <a:srgbClr val="00A896"/>
+          </a:solidFill>
+          <a:ln/>
+        </p:spPr>
+        <p:txBody>
+          <a:bodyPr/>
+          <a:lstStyle/>
+          <a:p>
+            <a:endParaRPr lang="pl-PL"/>
+          </a:p>
+        </p:txBody>
+      </p:sp>
+      <p:sp>
+        <p:nvSpPr>
+          <p:cNvPr id="4" name="Text 2">
+            <a:extLst>
+              <a:ext uri="{FF2B5EF4-FFF2-40B4-BE49-F238E27FC236}">
+                <a16:creationId xmlns:a16="http://schemas.microsoft.com/office/drawing/2014/main" id="{9C66F2A1-822F-0524-28BF-2B42B6D4AF00}"/>
+              </a:ext>
+            </a:extLst>
+          </p:cNvPr>
+          <p:cNvSpPr/>
+          <p:nvPr/>
+        </p:nvSpPr>
+        <p:spPr>
+          <a:xfrm>
+            <a:off x="838200" y="3063240"/>
+            <a:ext cx="10515600" cy="731520"/>
+          </a:xfrm>
+          <a:prstGeom prst="rect">
+            <a:avLst/>
+          </a:prstGeom>
+          <a:noFill/>
+          <a:ln/>
+        </p:spPr>
+        <p:txBody>
+          <a:bodyPr wrap="square" lIns="0" tIns="0" rIns="0" bIns="0" rtlCol="0" anchor="ctr"/>
+          <a:lstStyle/>
+          <a:p>
+            <a:pPr marL="0" indent="0">
+              <a:buNone/>
+            </a:pPr>
+            <a:r>
+              <a:rPr lang="en-US" sz="3400" b="1" dirty="0" err="1">
+                <a:solidFill>
+                  <a:srgbClr val="FFFFFF"/>
+                </a:solidFill>
+                <a:latin typeface="Georgia" pitchFamily="34" charset="0"/>
+                <a:ea typeface="Georgia" pitchFamily="34" charset="-122"/>
+                <a:cs typeface="Georgia" pitchFamily="34" charset="-120"/>
+              </a:rPr>
+              <a:t>Dziękujemy</a:t>
+            </a:r>
+            <a:r>
+              <a:rPr lang="en-US" sz="3400" b="1" dirty="0">
+                <a:solidFill>
+                  <a:srgbClr val="FFFFFF"/>
+                </a:solidFill>
+                <a:latin typeface="Georgia" pitchFamily="34" charset="0"/>
+                <a:ea typeface="Georgia" pitchFamily="34" charset="-122"/>
+                <a:cs typeface="Georgia" pitchFamily="34" charset="-120"/>
+              </a:rPr>
+              <a:t> za </a:t>
+            </a:r>
+            <a:r>
+              <a:rPr lang="en-US" sz="3400" b="1" dirty="0" err="1">
+                <a:solidFill>
+                  <a:srgbClr val="FFFFFF"/>
+                </a:solidFill>
+                <a:latin typeface="Georgia" pitchFamily="34" charset="0"/>
+                <a:ea typeface="Georgia" pitchFamily="34" charset="-122"/>
+                <a:cs typeface="Georgia" pitchFamily="34" charset="-120"/>
+              </a:rPr>
+              <a:t>uwagę</a:t>
+            </a:r>
+            <a:endParaRPr lang="en-US" sz="3400" dirty="0"/>
+          </a:p>
+        </p:txBody>
+      </p:sp>
+      <p:sp>
+        <p:nvSpPr>
+          <p:cNvPr id="21" name="Shape 19">
+            <a:extLst>
+              <a:ext uri="{FF2B5EF4-FFF2-40B4-BE49-F238E27FC236}">
+                <a16:creationId xmlns:a16="http://schemas.microsoft.com/office/drawing/2014/main" id="{8EFFD8BF-5CBC-DBEA-52D0-DF5A71EA23D9}"/>
+              </a:ext>
+            </a:extLst>
+          </p:cNvPr>
+          <p:cNvSpPr/>
+          <p:nvPr/>
+        </p:nvSpPr>
+        <p:spPr>
+          <a:xfrm>
+            <a:off x="838200" y="3872378"/>
+            <a:ext cx="10543032" cy="0"/>
+          </a:xfrm>
+          <a:prstGeom prst="line">
+            <a:avLst/>
+          </a:prstGeom>
+          <a:noFill/>
+          <a:ln w="19050">
+            <a:solidFill>
+              <a:srgbClr val="00A896"/>
+            </a:solidFill>
+            <a:prstDash val="solid"/>
+          </a:ln>
+        </p:spPr>
+        <p:txBody>
+          <a:bodyPr/>
+          <a:lstStyle/>
+          <a:p>
+            <a:endParaRPr lang="pl-PL"/>
+          </a:p>
+        </p:txBody>
+      </p:sp>
+    </p:spTree>
+    <p:extLst>
+      <p:ext uri="{BB962C8B-B14F-4D97-AF65-F5344CB8AC3E}">
+        <p14:creationId xmlns:p14="http://schemas.microsoft.com/office/powerpoint/2010/main" val="3373845836"/>
+      </p:ext>
+    </p:extLst>
   </p:cSld>
   <p:clrMapOvr>
     <a:masterClrMapping/>
